--- a/public/lessons/year-6-maths/autumn/week-4/solve-and-check-division-problems/teaching-powerpoint-v1.pptx
+++ b/public/lessons/year-6-maths/autumn/week-4/solve-and-check-division-problems/teaching-powerpoint-v1.pptx
@@ -2,24 +2,24 @@
 <file path=ppt/presentation.xml><?xml version="1.0" encoding="utf-8"?>
 <p:presentation xmlns:p="http://schemas.openxmlformats.org/presentationml/2006/main">
   <p:sldMasterIdLst>
-    <p:sldMasterId xmlns:r="http://schemas.openxmlformats.org/officeDocument/2006/relationships" id="2147483648" r:id="R25a44d17f675441c"/>
+    <p:sldMasterId xmlns:r="http://schemas.openxmlformats.org/officeDocument/2006/relationships" id="2147483648" r:id="R9147e714cd214d02"/>
   </p:sldMasterIdLst>
   <p:notesMasterIdLst>
-    <p:notesMasterId xmlns:r="http://schemas.openxmlformats.org/officeDocument/2006/relationships" r:id="Re7ed66a573c24f0a"/>
+    <p:notesMasterId xmlns:r="http://schemas.openxmlformats.org/officeDocument/2006/relationships" r:id="Rb33dd09efbec4c73"/>
   </p:notesMasterIdLst>
   <p:sldIdLst>
-    <p:sldId xmlns:r="http://schemas.openxmlformats.org/officeDocument/2006/relationships" id="256" r:id="Rf972cf40fc3a4a13"/>
-    <p:sldId xmlns:r="http://schemas.openxmlformats.org/officeDocument/2006/relationships" id="257" r:id="R56723c9f009e4373"/>
-    <p:sldId xmlns:r="http://schemas.openxmlformats.org/officeDocument/2006/relationships" id="258" r:id="Rec94d7f31db6461f"/>
-    <p:sldId xmlns:r="http://schemas.openxmlformats.org/officeDocument/2006/relationships" id="259" r:id="R5f7a2e7023b74a2e"/>
-    <p:sldId xmlns:r="http://schemas.openxmlformats.org/officeDocument/2006/relationships" id="260" r:id="Rbd019387ab7a4973"/>
-    <p:sldId xmlns:r="http://schemas.openxmlformats.org/officeDocument/2006/relationships" id="261" r:id="R869047a5e29d4e44"/>
-    <p:sldId xmlns:r="http://schemas.openxmlformats.org/officeDocument/2006/relationships" id="262" r:id="R7f46be42484f4077"/>
-    <p:sldId xmlns:r="http://schemas.openxmlformats.org/officeDocument/2006/relationships" id="263" r:id="R8f1ddb4d139e4de3"/>
-    <p:sldId xmlns:r="http://schemas.openxmlformats.org/officeDocument/2006/relationships" id="264" r:id="R881b0a9172154a51"/>
-    <p:sldId xmlns:r="http://schemas.openxmlformats.org/officeDocument/2006/relationships" id="265" r:id="R96b5342d0b8145c1"/>
-    <p:sldId xmlns:r="http://schemas.openxmlformats.org/officeDocument/2006/relationships" id="266" r:id="Rd5db768d767a4b6e"/>
-    <p:sldId xmlns:r="http://schemas.openxmlformats.org/officeDocument/2006/relationships" id="267" r:id="R622b85f4eb29489e"/>
+    <p:sldId xmlns:r="http://schemas.openxmlformats.org/officeDocument/2006/relationships" id="256" r:id="R8bf52c6acb4d49cb"/>
+    <p:sldId xmlns:r="http://schemas.openxmlformats.org/officeDocument/2006/relationships" id="257" r:id="R67ef7d5955734a0d"/>
+    <p:sldId xmlns:r="http://schemas.openxmlformats.org/officeDocument/2006/relationships" id="258" r:id="R9b44b3cf59784d49"/>
+    <p:sldId xmlns:r="http://schemas.openxmlformats.org/officeDocument/2006/relationships" id="259" r:id="R1b691baad3fa4ff2"/>
+    <p:sldId xmlns:r="http://schemas.openxmlformats.org/officeDocument/2006/relationships" id="260" r:id="R1e5119e90b1c4e28"/>
+    <p:sldId xmlns:r="http://schemas.openxmlformats.org/officeDocument/2006/relationships" id="261" r:id="Rb9384adefe524ebc"/>
+    <p:sldId xmlns:r="http://schemas.openxmlformats.org/officeDocument/2006/relationships" id="262" r:id="R89275ebc06de460a"/>
+    <p:sldId xmlns:r="http://schemas.openxmlformats.org/officeDocument/2006/relationships" id="263" r:id="Rd201dd5d79a24c6b"/>
+    <p:sldId xmlns:r="http://schemas.openxmlformats.org/officeDocument/2006/relationships" id="264" r:id="R9bb4927539b24b6c"/>
+    <p:sldId xmlns:r="http://schemas.openxmlformats.org/officeDocument/2006/relationships" id="265" r:id="Rbc3ff83c13e74e02"/>
+    <p:sldId xmlns:r="http://schemas.openxmlformats.org/officeDocument/2006/relationships" id="266" r:id="Re72c62e0e61d4ea6"/>
+    <p:sldId xmlns:r="http://schemas.openxmlformats.org/officeDocument/2006/relationships" id="267" r:id="R58636f4bc9914ca6"/>
   </p:sldIdLst>
   <p:sldSz cx="12192000" cy="6858000"/>
   <p:notesSz cx="6858000" cy="9144000"/>
@@ -873,7 +873,7 @@
           <a:lstStyle xmlns:a="http://schemas.openxmlformats.org/drawingml/2006/main"/>
           <a:p xmlns:a="http://schemas.openxmlformats.org/drawingml/2006/main">
             <a:r>
-              <a:t>I do. Reveal the question, setup and each calculation stage one click at a time. Pupils watch before copying. Model answer: 260.</a:t>
+              <a:t>I do. Reveal the question, then reveal each mathematical change one click at a time. Point to the numbers and operation that changed before moving to the next line. Final answer: 260.</a:t>
             </a:r>
           </a:p>
         </p:txBody>
@@ -1291,7 +1291,7 @@
   </p:cSld>
   <p:clrMap bg1="lt1" tx1="dk1" bg2="lt2" tx2="dk2" accent1="accent1" accent2="accent2" accent3="accent3" accent4="accent4" accent5="accent5" accent6="accent6" hlink="hlink" folHlink="folHlink"/>
   <p:sldLayoutIdLst>
-    <p:sldLayoutId xmlns:r="http://schemas.openxmlformats.org/officeDocument/2006/relationships" id="2147483649" r:id="R1f7691e5cb0644d7"/>
+    <p:sldLayoutId xmlns:r="http://schemas.openxmlformats.org/officeDocument/2006/relationships" id="2147483649" r:id="Rd5b704edc71d48d0"/>
   </p:sldLayoutIdLst>
   <p:txStyles>
     <p:titleStyle>
@@ -1842,7 +1842,7 @@
           <p:cNvPr id="12" name="">
             <a:extLst xmlns:a="http://schemas.openxmlformats.org/drawingml/2006/main">
               <a:ext uri="{FF2B5EF4-FFF2-40B4-BE49-F238E27FC236}">
-                <a16:creationId xmlns:a16="http://schemas.microsoft.com/office/drawing/2014/main" id="{219B0671-1E5B-4002-B319-125F12AE0E14}"/>
+                <a16:creationId xmlns:a16="http://schemas.microsoft.com/office/drawing/2014/main" id="{6AF27A57-633C-4972-820F-F6297DAE2E8D}"/>
               </a:ext>
             </a:extLst>
           </p:cNvPr>
@@ -1874,7 +1874,7 @@
           <p:cNvPr id="2" name="">
             <a:extLst xmlns:a="http://schemas.openxmlformats.org/drawingml/2006/main">
               <a:ext uri="{FF2B5EF4-FFF2-40B4-BE49-F238E27FC236}">
-                <a16:creationId xmlns:a16="http://schemas.microsoft.com/office/drawing/2014/main" id="{EEFDE9ED-8FF2-444B-884A-5CC0FB7BCAF9}"/>
+                <a16:creationId xmlns:a16="http://schemas.microsoft.com/office/drawing/2014/main" id="{94E138D9-CCCF-4437-A022-D240B90BC227}"/>
               </a:ext>
             </a:extLst>
           </p:cNvPr>
@@ -1931,7 +1931,7 @@
           <p:cNvPr id="3" name="">
             <a:extLst xmlns:a="http://schemas.openxmlformats.org/drawingml/2006/main">
               <a:ext uri="{FF2B5EF4-FFF2-40B4-BE49-F238E27FC236}">
-                <a16:creationId xmlns:a16="http://schemas.microsoft.com/office/drawing/2014/main" id="{DB38A524-84BE-4DC7-A48C-DB21EE4D6446}"/>
+                <a16:creationId xmlns:a16="http://schemas.microsoft.com/office/drawing/2014/main" id="{9BF76022-C0F4-4308-B0DE-BA3B469B1659}"/>
               </a:ext>
             </a:extLst>
           </p:cNvPr>
@@ -1965,7 +1965,7 @@
           <p:cNvPr id="4" name="">
             <a:extLst xmlns:a="http://schemas.openxmlformats.org/drawingml/2006/main">
               <a:ext uri="{FF2B5EF4-FFF2-40B4-BE49-F238E27FC236}">
-                <a16:creationId xmlns:a16="http://schemas.microsoft.com/office/drawing/2014/main" id="{96016739-D942-45BB-9562-565BEB68640C}"/>
+                <a16:creationId xmlns:a16="http://schemas.microsoft.com/office/drawing/2014/main" id="{5D5D7945-BD80-4D86-9E69-D000FA53ED65}"/>
               </a:ext>
             </a:extLst>
           </p:cNvPr>
@@ -2022,7 +2022,7 @@
           <p:cNvPr id="5" name="">
             <a:extLst xmlns:a="http://schemas.openxmlformats.org/drawingml/2006/main">
               <a:ext uri="{FF2B5EF4-FFF2-40B4-BE49-F238E27FC236}">
-                <a16:creationId xmlns:a16="http://schemas.microsoft.com/office/drawing/2014/main" id="{F4CAA3D6-AE1F-4CCE-A9F3-DE1C6B713276}"/>
+                <a16:creationId xmlns:a16="http://schemas.microsoft.com/office/drawing/2014/main" id="{E6174BF3-3B80-44D6-B62A-835F0D689F97}"/>
               </a:ext>
             </a:extLst>
           </p:cNvPr>
@@ -2079,7 +2079,7 @@
           <p:cNvPr id="6" name="">
             <a:extLst xmlns:a="http://schemas.openxmlformats.org/drawingml/2006/main">
               <a:ext uri="{FF2B5EF4-FFF2-40B4-BE49-F238E27FC236}">
-                <a16:creationId xmlns:a16="http://schemas.microsoft.com/office/drawing/2014/main" id="{405E8E78-C486-4C36-B3D1-237351042BCB}"/>
+                <a16:creationId xmlns:a16="http://schemas.microsoft.com/office/drawing/2014/main" id="{412C30CF-B784-4D28-AF34-669D5BA8ABF9}"/>
               </a:ext>
             </a:extLst>
           </p:cNvPr>
@@ -2113,7 +2113,7 @@
           <p:cNvPr id="7" name="">
             <a:extLst xmlns:a="http://schemas.openxmlformats.org/drawingml/2006/main">
               <a:ext uri="{FF2B5EF4-FFF2-40B4-BE49-F238E27FC236}">
-                <a16:creationId xmlns:a16="http://schemas.microsoft.com/office/drawing/2014/main" id="{56135944-35CD-41D5-AC28-C6E548BEFC81}"/>
+                <a16:creationId xmlns:a16="http://schemas.microsoft.com/office/drawing/2014/main" id="{042BE33D-9731-4C39-900C-893BA0C7E137}"/>
               </a:ext>
             </a:extLst>
           </p:cNvPr>
@@ -2170,7 +2170,7 @@
           <p:cNvPr id="8" name="">
             <a:extLst xmlns:a="http://schemas.openxmlformats.org/drawingml/2006/main">
               <a:ext uri="{FF2B5EF4-FFF2-40B4-BE49-F238E27FC236}">
-                <a16:creationId xmlns:a16="http://schemas.microsoft.com/office/drawing/2014/main" id="{F71DB87D-5B33-4F52-9659-55E27A0202D4}"/>
+                <a16:creationId xmlns:a16="http://schemas.microsoft.com/office/drawing/2014/main" id="{D9B08081-EE73-4DEB-BA3F-C77792BA2383}"/>
               </a:ext>
             </a:extLst>
           </p:cNvPr>
@@ -2227,7 +2227,7 @@
           <p:cNvPr id="9" name="">
             <a:extLst xmlns:a="http://schemas.openxmlformats.org/drawingml/2006/main">
               <a:ext uri="{FF2B5EF4-FFF2-40B4-BE49-F238E27FC236}">
-                <a16:creationId xmlns:a16="http://schemas.microsoft.com/office/drawing/2014/main" id="{70B9B266-08FA-4161-87D7-710EBEE51BCF}"/>
+                <a16:creationId xmlns:a16="http://schemas.microsoft.com/office/drawing/2014/main" id="{D8F8DE1B-045A-4A07-ADC5-91209737CDFD}"/>
               </a:ext>
             </a:extLst>
           </p:cNvPr>
@@ -2284,7 +2284,7 @@
           <p:cNvPr id="10" name="">
             <a:extLst xmlns:a="http://schemas.openxmlformats.org/drawingml/2006/main">
               <a:ext uri="{FF2B5EF4-FFF2-40B4-BE49-F238E27FC236}">
-                <a16:creationId xmlns:a16="http://schemas.microsoft.com/office/drawing/2014/main" id="{5638955F-3A17-49E9-AD92-E2A63C927070}"/>
+                <a16:creationId xmlns:a16="http://schemas.microsoft.com/office/drawing/2014/main" id="{C52026FF-24C0-429A-BA04-01D7A9DEE808}"/>
               </a:ext>
             </a:extLst>
           </p:cNvPr>
@@ -2341,7 +2341,7 @@
           <p:cNvPr id="11" name="">
             <a:extLst xmlns:a="http://schemas.openxmlformats.org/drawingml/2006/main">
               <a:ext uri="{FF2B5EF4-FFF2-40B4-BE49-F238E27FC236}">
-                <a16:creationId xmlns:a16="http://schemas.microsoft.com/office/drawing/2014/main" id="{B69A1FA9-D50D-4A31-835A-5CEEC00728FE}"/>
+                <a16:creationId xmlns:a16="http://schemas.microsoft.com/office/drawing/2014/main" id="{FA8C6B7F-F8BD-450E-AC33-06A27FA950C6}"/>
               </a:ext>
             </a:extLst>
           </p:cNvPr>
@@ -2396,7 +2396,7 @@
     </p:spTree>
     <p:extLst>
       <p:ext uri="{BB962C8B-B14F-4D97-AF65-F5344CB8AC3E}">
-        <p14:creationId xmlns:p14="http://schemas.microsoft.com/office/powerpoint/2010/main" val="1712882426"/>
+        <p14:creationId xmlns:p14="http://schemas.microsoft.com/office/powerpoint/2010/main" val="771687232"/>
       </p:ext>
     </p:extLst>
   </p:cSld>
@@ -2427,7 +2427,7 @@
           <p:cNvPr id="14" name="">
             <a:extLst xmlns:a="http://schemas.openxmlformats.org/drawingml/2006/main">
               <a:ext uri="{FF2B5EF4-FFF2-40B4-BE49-F238E27FC236}">
-                <a16:creationId xmlns:a16="http://schemas.microsoft.com/office/drawing/2014/main" id="{F1D13908-B88B-4CBA-ACCE-DA6B9CAB9F1F}"/>
+                <a16:creationId xmlns:a16="http://schemas.microsoft.com/office/drawing/2014/main" id="{7EBEF0A9-3F5B-4106-99C1-D094A42701C6}"/>
               </a:ext>
             </a:extLst>
           </p:cNvPr>
@@ -2459,7 +2459,7 @@
           <p:cNvPr id="2" name="">
             <a:extLst xmlns:a="http://schemas.openxmlformats.org/drawingml/2006/main">
               <a:ext uri="{FF2B5EF4-FFF2-40B4-BE49-F238E27FC236}">
-                <a16:creationId xmlns:a16="http://schemas.microsoft.com/office/drawing/2014/main" id="{E964A242-5A10-45C8-864B-24CB75EFA72B}"/>
+                <a16:creationId xmlns:a16="http://schemas.microsoft.com/office/drawing/2014/main" id="{1D7652B8-6BE0-404A-824F-11214A7E8622}"/>
               </a:ext>
             </a:extLst>
           </p:cNvPr>
@@ -2516,7 +2516,7 @@
           <p:cNvPr id="3" name="">
             <a:extLst xmlns:a="http://schemas.openxmlformats.org/drawingml/2006/main">
               <a:ext uri="{FF2B5EF4-FFF2-40B4-BE49-F238E27FC236}">
-                <a16:creationId xmlns:a16="http://schemas.microsoft.com/office/drawing/2014/main" id="{E551A0F6-C4B6-4E3D-B013-48A8C26A9D3A}"/>
+                <a16:creationId xmlns:a16="http://schemas.microsoft.com/office/drawing/2014/main" id="{02D8DB72-ABC6-4DA1-8D0D-AE862C9B4A6D}"/>
               </a:ext>
             </a:extLst>
           </p:cNvPr>
@@ -2548,7 +2548,7 @@
           <p:cNvPr id="4" name="">
             <a:extLst xmlns:a="http://schemas.openxmlformats.org/drawingml/2006/main">
               <a:ext uri="{FF2B5EF4-FFF2-40B4-BE49-F238E27FC236}">
-                <a16:creationId xmlns:a16="http://schemas.microsoft.com/office/drawing/2014/main" id="{10310BB5-E854-4E43-B2D9-03CFB47E3C11}"/>
+                <a16:creationId xmlns:a16="http://schemas.microsoft.com/office/drawing/2014/main" id="{813497EC-3E3C-4EBA-8964-D4301765F838}"/>
               </a:ext>
             </a:extLst>
           </p:cNvPr>
@@ -2605,7 +2605,7 @@
           <p:cNvPr id="5" name="">
             <a:extLst xmlns:a="http://schemas.openxmlformats.org/drawingml/2006/main">
               <a:ext uri="{FF2B5EF4-FFF2-40B4-BE49-F238E27FC236}">
-                <a16:creationId xmlns:a16="http://schemas.microsoft.com/office/drawing/2014/main" id="{CD3298DF-9D0E-4699-9D37-C152FDE3A77E}"/>
+                <a16:creationId xmlns:a16="http://schemas.microsoft.com/office/drawing/2014/main" id="{9244F8C7-E30B-4886-8028-2254BE7ACB68}"/>
               </a:ext>
             </a:extLst>
           </p:cNvPr>
@@ -2662,7 +2662,7 @@
           <p:cNvPr id="6" name="">
             <a:extLst xmlns:a="http://schemas.openxmlformats.org/drawingml/2006/main">
               <a:ext uri="{FF2B5EF4-FFF2-40B4-BE49-F238E27FC236}">
-                <a16:creationId xmlns:a16="http://schemas.microsoft.com/office/drawing/2014/main" id="{D98BEEAB-E8A1-4335-A68C-3844F361FBC6}"/>
+                <a16:creationId xmlns:a16="http://schemas.microsoft.com/office/drawing/2014/main" id="{D8DB94DB-A6FD-423B-9650-93B70191BA94}"/>
               </a:ext>
             </a:extLst>
           </p:cNvPr>
@@ -2719,7 +2719,7 @@
           <p:cNvPr id="7" name="">
             <a:extLst xmlns:a="http://schemas.openxmlformats.org/drawingml/2006/main">
               <a:ext uri="{FF2B5EF4-FFF2-40B4-BE49-F238E27FC236}">
-                <a16:creationId xmlns:a16="http://schemas.microsoft.com/office/drawing/2014/main" id="{EEDEFC5F-E7E0-499C-8ECE-637F75E514B1}"/>
+                <a16:creationId xmlns:a16="http://schemas.microsoft.com/office/drawing/2014/main" id="{0A7D2E03-2646-4D64-9490-A6E8E6274BEE}"/>
               </a:ext>
             </a:extLst>
           </p:cNvPr>
@@ -2751,7 +2751,7 @@
           <p:cNvPr id="8" name="">
             <a:extLst xmlns:a="http://schemas.openxmlformats.org/drawingml/2006/main">
               <a:ext uri="{FF2B5EF4-FFF2-40B4-BE49-F238E27FC236}">
-                <a16:creationId xmlns:a16="http://schemas.microsoft.com/office/drawing/2014/main" id="{2BBDDF2A-F9FA-44EB-A6BD-0CAE81614452}"/>
+                <a16:creationId xmlns:a16="http://schemas.microsoft.com/office/drawing/2014/main" id="{16976D18-5E33-4940-A71C-EDAEA6C5F345}"/>
               </a:ext>
             </a:extLst>
           </p:cNvPr>
@@ -2808,7 +2808,7 @@
           <p:cNvPr id="9" name="">
             <a:extLst xmlns:a="http://schemas.openxmlformats.org/drawingml/2006/main">
               <a:ext uri="{FF2B5EF4-FFF2-40B4-BE49-F238E27FC236}">
-                <a16:creationId xmlns:a16="http://schemas.microsoft.com/office/drawing/2014/main" id="{CD63769C-562F-4858-8E50-60CBB1F650C1}"/>
+                <a16:creationId xmlns:a16="http://schemas.microsoft.com/office/drawing/2014/main" id="{1441ED93-FFCA-4610-812F-30C724F6ED14}"/>
               </a:ext>
             </a:extLst>
           </p:cNvPr>
@@ -2865,7 +2865,7 @@
           <p:cNvPr id="10" name="">
             <a:extLst xmlns:a="http://schemas.openxmlformats.org/drawingml/2006/main">
               <a:ext uri="{FF2B5EF4-FFF2-40B4-BE49-F238E27FC236}">
-                <a16:creationId xmlns:a16="http://schemas.microsoft.com/office/drawing/2014/main" id="{0FDB96EA-0E2E-4CDF-A059-429EDDD51EC2}"/>
+                <a16:creationId xmlns:a16="http://schemas.microsoft.com/office/drawing/2014/main" id="{41A993D6-5C3E-4C4E-9B00-2910364C50A9}"/>
               </a:ext>
             </a:extLst>
           </p:cNvPr>
@@ -2922,7 +2922,7 @@
           <p:cNvPr id="11" name="">
             <a:extLst xmlns:a="http://schemas.openxmlformats.org/drawingml/2006/main">
               <a:ext uri="{FF2B5EF4-FFF2-40B4-BE49-F238E27FC236}">
-                <a16:creationId xmlns:a16="http://schemas.microsoft.com/office/drawing/2014/main" id="{969F8DB1-00C8-4958-B2BB-38CA93341125}"/>
+                <a16:creationId xmlns:a16="http://schemas.microsoft.com/office/drawing/2014/main" id="{317646F7-9D0E-48E4-B869-4185939202FF}"/>
               </a:ext>
             </a:extLst>
           </p:cNvPr>
@@ -2979,7 +2979,7 @@
           <p:cNvPr id="12" name="">
             <a:extLst xmlns:a="http://schemas.openxmlformats.org/drawingml/2006/main">
               <a:ext uri="{FF2B5EF4-FFF2-40B4-BE49-F238E27FC236}">
-                <a16:creationId xmlns:a16="http://schemas.microsoft.com/office/drawing/2014/main" id="{0F538B42-82F0-40DD-A16A-8F6AFA027152}"/>
+                <a16:creationId xmlns:a16="http://schemas.microsoft.com/office/drawing/2014/main" id="{AB4719F6-6CC7-4E8B-99DB-65B0FDEEE435}"/>
               </a:ext>
             </a:extLst>
           </p:cNvPr>
@@ -3036,7 +3036,7 @@
           <p:cNvPr id="13" name="">
             <a:extLst xmlns:a="http://schemas.openxmlformats.org/drawingml/2006/main">
               <a:ext uri="{FF2B5EF4-FFF2-40B4-BE49-F238E27FC236}">
-                <a16:creationId xmlns:a16="http://schemas.microsoft.com/office/drawing/2014/main" id="{0BBA9DDF-A41A-4FBC-87CF-17F84CECDA08}"/>
+                <a16:creationId xmlns:a16="http://schemas.microsoft.com/office/drawing/2014/main" id="{B9724579-920D-4904-9320-0062561B2A50}"/>
               </a:ext>
             </a:extLst>
           </p:cNvPr>
@@ -3091,7 +3091,7 @@
     </p:spTree>
     <p:extLst>
       <p:ext uri="{BB962C8B-B14F-4D97-AF65-F5344CB8AC3E}">
-        <p14:creationId xmlns:p14="http://schemas.microsoft.com/office/powerpoint/2010/main" val="864257512"/>
+        <p14:creationId xmlns:p14="http://schemas.microsoft.com/office/powerpoint/2010/main" val="1475553001"/>
       </p:ext>
     </p:extLst>
   </p:cSld>
@@ -3292,7 +3292,7 @@
           <p:cNvPr id="19" name="">
             <a:extLst xmlns:a="http://schemas.openxmlformats.org/drawingml/2006/main">
               <a:ext uri="{FF2B5EF4-FFF2-40B4-BE49-F238E27FC236}">
-                <a16:creationId xmlns:a16="http://schemas.microsoft.com/office/drawing/2014/main" id="{CB848149-D820-48FA-ABC4-4D67B38453C9}"/>
+                <a16:creationId xmlns:a16="http://schemas.microsoft.com/office/drawing/2014/main" id="{F4ECF76A-0293-4194-A53B-B799938B1472}"/>
               </a:ext>
             </a:extLst>
           </p:cNvPr>
@@ -3324,7 +3324,7 @@
           <p:cNvPr id="2" name="">
             <a:extLst xmlns:a="http://schemas.openxmlformats.org/drawingml/2006/main">
               <a:ext uri="{FF2B5EF4-FFF2-40B4-BE49-F238E27FC236}">
-                <a16:creationId xmlns:a16="http://schemas.microsoft.com/office/drawing/2014/main" id="{FD7D3E79-C5A4-4A6E-A7C5-18419945F644}"/>
+                <a16:creationId xmlns:a16="http://schemas.microsoft.com/office/drawing/2014/main" id="{63BA901A-79CC-4072-973F-EFDE9708F273}"/>
               </a:ext>
             </a:extLst>
           </p:cNvPr>
@@ -3381,7 +3381,7 @@
           <p:cNvPr id="3" name="">
             <a:extLst xmlns:a="http://schemas.openxmlformats.org/drawingml/2006/main">
               <a:ext uri="{FF2B5EF4-FFF2-40B4-BE49-F238E27FC236}">
-                <a16:creationId xmlns:a16="http://schemas.microsoft.com/office/drawing/2014/main" id="{3EA0FE31-E28A-4322-8879-45C4D52120B0}"/>
+                <a16:creationId xmlns:a16="http://schemas.microsoft.com/office/drawing/2014/main" id="{029330D6-BD81-4904-9782-AD66CF2AE4F2}"/>
               </a:ext>
             </a:extLst>
           </p:cNvPr>
@@ -3413,7 +3413,7 @@
           <p:cNvPr id="4" name="">
             <a:extLst xmlns:a="http://schemas.openxmlformats.org/drawingml/2006/main">
               <a:ext uri="{FF2B5EF4-FFF2-40B4-BE49-F238E27FC236}">
-                <a16:creationId xmlns:a16="http://schemas.microsoft.com/office/drawing/2014/main" id="{DC31F100-71ED-49C6-BF9B-E221EA9F1001}"/>
+                <a16:creationId xmlns:a16="http://schemas.microsoft.com/office/drawing/2014/main" id="{1AF7719D-CDE7-4469-B19E-1639C71D21B7}"/>
               </a:ext>
             </a:extLst>
           </p:cNvPr>
@@ -3470,7 +3470,7 @@
           <p:cNvPr id="5" name="">
             <a:extLst xmlns:a="http://schemas.openxmlformats.org/drawingml/2006/main">
               <a:ext uri="{FF2B5EF4-FFF2-40B4-BE49-F238E27FC236}">
-                <a16:creationId xmlns:a16="http://schemas.microsoft.com/office/drawing/2014/main" id="{E7F47DAE-7BF2-4A98-8F36-D352995B3A48}"/>
+                <a16:creationId xmlns:a16="http://schemas.microsoft.com/office/drawing/2014/main" id="{D859C3E2-03CF-478B-9739-C5A08C29A5D6}"/>
               </a:ext>
             </a:extLst>
           </p:cNvPr>
@@ -3527,7 +3527,7 @@
           <p:cNvPr id="6" name="">
             <a:extLst xmlns:a="http://schemas.openxmlformats.org/drawingml/2006/main">
               <a:ext uri="{FF2B5EF4-FFF2-40B4-BE49-F238E27FC236}">
-                <a16:creationId xmlns:a16="http://schemas.microsoft.com/office/drawing/2014/main" id="{D4406E44-AEE2-415B-8316-4A95A2F809A1}"/>
+                <a16:creationId xmlns:a16="http://schemas.microsoft.com/office/drawing/2014/main" id="{FEF7F72C-15BF-49A6-A9BD-3D86A4358CF3}"/>
               </a:ext>
             </a:extLst>
           </p:cNvPr>
@@ -3584,7 +3584,7 @@
           <p:cNvPr id="7" name="">
             <a:extLst xmlns:a="http://schemas.openxmlformats.org/drawingml/2006/main">
               <a:ext uri="{FF2B5EF4-FFF2-40B4-BE49-F238E27FC236}">
-                <a16:creationId xmlns:a16="http://schemas.microsoft.com/office/drawing/2014/main" id="{0D4A1BAB-7F7E-412D-9C65-097C8B73D48E}"/>
+                <a16:creationId xmlns:a16="http://schemas.microsoft.com/office/drawing/2014/main" id="{6CDB1DE2-913C-4953-9BEF-868A6577F129}"/>
               </a:ext>
             </a:extLst>
           </p:cNvPr>
@@ -3616,7 +3616,7 @@
           <p:cNvPr id="8" name="">
             <a:extLst xmlns:a="http://schemas.openxmlformats.org/drawingml/2006/main">
               <a:ext uri="{FF2B5EF4-FFF2-40B4-BE49-F238E27FC236}">
-                <a16:creationId xmlns:a16="http://schemas.microsoft.com/office/drawing/2014/main" id="{1578F629-12BF-44E8-8BD9-BE13D821427E}"/>
+                <a16:creationId xmlns:a16="http://schemas.microsoft.com/office/drawing/2014/main" id="{1902C32A-194B-405C-89BD-85AF60B41160}"/>
               </a:ext>
             </a:extLst>
           </p:cNvPr>
@@ -3673,7 +3673,7 @@
           <p:cNvPr id="9" name="">
             <a:extLst xmlns:a="http://schemas.openxmlformats.org/drawingml/2006/main">
               <a:ext uri="{FF2B5EF4-FFF2-40B4-BE49-F238E27FC236}">
-                <a16:creationId xmlns:a16="http://schemas.microsoft.com/office/drawing/2014/main" id="{892E6F05-EDF9-447F-96D2-B53E35F15749}"/>
+                <a16:creationId xmlns:a16="http://schemas.microsoft.com/office/drawing/2014/main" id="{B17B9E66-A93D-4E1D-BCA8-72E96DD44A8A}"/>
               </a:ext>
             </a:extLst>
           </p:cNvPr>
@@ -3730,7 +3730,7 @@
           <p:cNvPr id="10" name="">
             <a:extLst xmlns:a="http://schemas.openxmlformats.org/drawingml/2006/main">
               <a:ext uri="{FF2B5EF4-FFF2-40B4-BE49-F238E27FC236}">
-                <a16:creationId xmlns:a16="http://schemas.microsoft.com/office/drawing/2014/main" id="{E93610D0-D158-451A-876F-439E28DB4FD1}"/>
+                <a16:creationId xmlns:a16="http://schemas.microsoft.com/office/drawing/2014/main" id="{553BF983-970B-43D3-BD95-79BDDB219BE1}"/>
               </a:ext>
             </a:extLst>
           </p:cNvPr>
@@ -3787,7 +3787,7 @@
           <p:cNvPr id="11" name="">
             <a:extLst xmlns:a="http://schemas.openxmlformats.org/drawingml/2006/main">
               <a:ext uri="{FF2B5EF4-FFF2-40B4-BE49-F238E27FC236}">
-                <a16:creationId xmlns:a16="http://schemas.microsoft.com/office/drawing/2014/main" id="{DED78354-6E74-4DAF-B02A-9F43A32ADC70}"/>
+                <a16:creationId xmlns:a16="http://schemas.microsoft.com/office/drawing/2014/main" id="{00BFC6EA-0CEA-4433-83B8-AAAFF470B977}"/>
               </a:ext>
             </a:extLst>
           </p:cNvPr>
@@ -3821,7 +3821,7 @@
           <p:cNvPr id="12" name="">
             <a:extLst xmlns:a="http://schemas.openxmlformats.org/drawingml/2006/main">
               <a:ext uri="{FF2B5EF4-FFF2-40B4-BE49-F238E27FC236}">
-                <a16:creationId xmlns:a16="http://schemas.microsoft.com/office/drawing/2014/main" id="{F0F1B1A3-D01B-4B31-956E-48DC4EFDD31C}"/>
+                <a16:creationId xmlns:a16="http://schemas.microsoft.com/office/drawing/2014/main" id="{DD08CDBE-92B0-445C-B354-36645E840F49}"/>
               </a:ext>
             </a:extLst>
           </p:cNvPr>
@@ -3878,7 +3878,7 @@
           <p:cNvPr id="13" name="">
             <a:extLst xmlns:a="http://schemas.openxmlformats.org/drawingml/2006/main">
               <a:ext uri="{FF2B5EF4-FFF2-40B4-BE49-F238E27FC236}">
-                <a16:creationId xmlns:a16="http://schemas.microsoft.com/office/drawing/2014/main" id="{D477E58F-6964-4193-88EB-8124F95A0432}"/>
+                <a16:creationId xmlns:a16="http://schemas.microsoft.com/office/drawing/2014/main" id="{66AE8A95-045D-4D11-8B6D-E95023A18684}"/>
               </a:ext>
             </a:extLst>
           </p:cNvPr>
@@ -3935,7 +3935,7 @@
           <p:cNvPr id="14" name="">
             <a:extLst xmlns:a="http://schemas.openxmlformats.org/drawingml/2006/main">
               <a:ext uri="{FF2B5EF4-FFF2-40B4-BE49-F238E27FC236}">
-                <a16:creationId xmlns:a16="http://schemas.microsoft.com/office/drawing/2014/main" id="{E9CB21E2-6347-4EA5-B2C0-166686DF96AD}"/>
+                <a16:creationId xmlns:a16="http://schemas.microsoft.com/office/drawing/2014/main" id="{52DD689D-D579-4D9B-A4BC-39F7A90C4F05}"/>
               </a:ext>
             </a:extLst>
           </p:cNvPr>
@@ -3992,7 +3992,7 @@
           <p:cNvPr id="15" name="">
             <a:extLst xmlns:a="http://schemas.openxmlformats.org/drawingml/2006/main">
               <a:ext uri="{FF2B5EF4-FFF2-40B4-BE49-F238E27FC236}">
-                <a16:creationId xmlns:a16="http://schemas.microsoft.com/office/drawing/2014/main" id="{C7734A3A-5D6E-47A0-B5C6-49F4D4825082}"/>
+                <a16:creationId xmlns:a16="http://schemas.microsoft.com/office/drawing/2014/main" id="{EAED4D7A-AF9C-4FCD-BB74-85A894782FB6}"/>
               </a:ext>
             </a:extLst>
           </p:cNvPr>
@@ -4026,7 +4026,7 @@
           <p:cNvPr id="16" name="">
             <a:extLst xmlns:a="http://schemas.openxmlformats.org/drawingml/2006/main">
               <a:ext uri="{FF2B5EF4-FFF2-40B4-BE49-F238E27FC236}">
-                <a16:creationId xmlns:a16="http://schemas.microsoft.com/office/drawing/2014/main" id="{E6BC6333-A74B-4562-BFA4-5217880F945E}"/>
+                <a16:creationId xmlns:a16="http://schemas.microsoft.com/office/drawing/2014/main" id="{3BE88E26-F3AB-4AE9-AE13-5F8DC8FC1573}"/>
               </a:ext>
             </a:extLst>
           </p:cNvPr>
@@ -4083,7 +4083,7 @@
           <p:cNvPr id="17" name="">
             <a:extLst xmlns:a="http://schemas.openxmlformats.org/drawingml/2006/main">
               <a:ext uri="{FF2B5EF4-FFF2-40B4-BE49-F238E27FC236}">
-                <a16:creationId xmlns:a16="http://schemas.microsoft.com/office/drawing/2014/main" id="{D53F1DBA-C7DF-4250-ADD5-344021641C7A}"/>
+                <a16:creationId xmlns:a16="http://schemas.microsoft.com/office/drawing/2014/main" id="{EFA19F2B-C5D0-429F-BC09-13086E402049}"/>
               </a:ext>
             </a:extLst>
           </p:cNvPr>
@@ -4140,7 +4140,7 @@
           <p:cNvPr id="18" name="">
             <a:extLst xmlns:a="http://schemas.openxmlformats.org/drawingml/2006/main">
               <a:ext uri="{FF2B5EF4-FFF2-40B4-BE49-F238E27FC236}">
-                <a16:creationId xmlns:a16="http://schemas.microsoft.com/office/drawing/2014/main" id="{2857B16A-0CF5-49EB-8206-8A6C1164AE07}"/>
+                <a16:creationId xmlns:a16="http://schemas.microsoft.com/office/drawing/2014/main" id="{9FD70F0F-0D97-4822-B72E-8F1715DC8D25}"/>
               </a:ext>
             </a:extLst>
           </p:cNvPr>
@@ -4195,7 +4195,7 @@
     </p:spTree>
     <p:extLst>
       <p:ext uri="{BB962C8B-B14F-4D97-AF65-F5344CB8AC3E}">
-        <p14:creationId xmlns:p14="http://schemas.microsoft.com/office/powerpoint/2010/main" val="460270159"/>
+        <p14:creationId xmlns:p14="http://schemas.microsoft.com/office/powerpoint/2010/main" val="1807651636"/>
       </p:ext>
     </p:extLst>
   </p:cSld>
@@ -4350,7 +4350,7 @@
           <p:cNvPr id="23" name="">
             <a:extLst xmlns:a="http://schemas.openxmlformats.org/drawingml/2006/main">
               <a:ext uri="{FF2B5EF4-FFF2-40B4-BE49-F238E27FC236}">
-                <a16:creationId xmlns:a16="http://schemas.microsoft.com/office/drawing/2014/main" id="{F0FEB1B3-BF1D-4C8E-A1A0-8E5D94EBF2BD}"/>
+                <a16:creationId xmlns:a16="http://schemas.microsoft.com/office/drawing/2014/main" id="{6DE5A8FB-9C9A-4B2A-BBE3-8070F7854B7C}"/>
               </a:ext>
             </a:extLst>
           </p:cNvPr>
@@ -4382,7 +4382,7 @@
           <p:cNvPr id="2" name="">
             <a:extLst xmlns:a="http://schemas.openxmlformats.org/drawingml/2006/main">
               <a:ext uri="{FF2B5EF4-FFF2-40B4-BE49-F238E27FC236}">
-                <a16:creationId xmlns:a16="http://schemas.microsoft.com/office/drawing/2014/main" id="{C64FDE64-02F1-4DC9-82F3-A4B96FB039FF}"/>
+                <a16:creationId xmlns:a16="http://schemas.microsoft.com/office/drawing/2014/main" id="{194BC2B8-330C-4905-ACE9-7586A65EE475}"/>
               </a:ext>
             </a:extLst>
           </p:cNvPr>
@@ -4439,7 +4439,7 @@
           <p:cNvPr id="3" name="">
             <a:extLst xmlns:a="http://schemas.openxmlformats.org/drawingml/2006/main">
               <a:ext uri="{FF2B5EF4-FFF2-40B4-BE49-F238E27FC236}">
-                <a16:creationId xmlns:a16="http://schemas.microsoft.com/office/drawing/2014/main" id="{3EF3BD5F-0E8B-4E59-92B1-7628EB37E7F3}"/>
+                <a16:creationId xmlns:a16="http://schemas.microsoft.com/office/drawing/2014/main" id="{51E75822-55BA-487F-98A9-16F5B5DB8288}"/>
               </a:ext>
             </a:extLst>
           </p:cNvPr>
@@ -4471,7 +4471,7 @@
           <p:cNvPr id="4" name="">
             <a:extLst xmlns:a="http://schemas.openxmlformats.org/drawingml/2006/main">
               <a:ext uri="{FF2B5EF4-FFF2-40B4-BE49-F238E27FC236}">
-                <a16:creationId xmlns:a16="http://schemas.microsoft.com/office/drawing/2014/main" id="{B08C3656-97C9-4AF6-8C61-11B58A97F8BD}"/>
+                <a16:creationId xmlns:a16="http://schemas.microsoft.com/office/drawing/2014/main" id="{BF9228CF-52F3-4270-9867-1096ADBC9F39}"/>
               </a:ext>
             </a:extLst>
           </p:cNvPr>
@@ -4528,7 +4528,7 @@
           <p:cNvPr id="5" name="">
             <a:extLst xmlns:a="http://schemas.openxmlformats.org/drawingml/2006/main">
               <a:ext uri="{FF2B5EF4-FFF2-40B4-BE49-F238E27FC236}">
-                <a16:creationId xmlns:a16="http://schemas.microsoft.com/office/drawing/2014/main" id="{829BA415-D1AB-48C9-877E-4AE4CFB7D6BF}"/>
+                <a16:creationId xmlns:a16="http://schemas.microsoft.com/office/drawing/2014/main" id="{6DD50098-C08E-456B-AACF-171279F0AB6D}"/>
               </a:ext>
             </a:extLst>
           </p:cNvPr>
@@ -4585,7 +4585,7 @@
           <p:cNvPr id="6" name="">
             <a:extLst xmlns:a="http://schemas.openxmlformats.org/drawingml/2006/main">
               <a:ext uri="{FF2B5EF4-FFF2-40B4-BE49-F238E27FC236}">
-                <a16:creationId xmlns:a16="http://schemas.microsoft.com/office/drawing/2014/main" id="{F4390CD4-166B-489B-BE09-9A07B2035054}"/>
+                <a16:creationId xmlns:a16="http://schemas.microsoft.com/office/drawing/2014/main" id="{50F54A8D-1F16-4722-8A3E-CD9C7004DC7F}"/>
               </a:ext>
             </a:extLst>
           </p:cNvPr>
@@ -4642,7 +4642,7 @@
           <p:cNvPr id="7" name="">
             <a:extLst xmlns:a="http://schemas.openxmlformats.org/drawingml/2006/main">
               <a:ext uri="{FF2B5EF4-FFF2-40B4-BE49-F238E27FC236}">
-                <a16:creationId xmlns:a16="http://schemas.microsoft.com/office/drawing/2014/main" id="{D5928387-318E-4622-9591-5D606B47125B}"/>
+                <a16:creationId xmlns:a16="http://schemas.microsoft.com/office/drawing/2014/main" id="{FC543B29-4BD0-4946-9B2C-6EA2A9AC3FBC}"/>
               </a:ext>
             </a:extLst>
           </p:cNvPr>
@@ -4674,7 +4674,7 @@
           <p:cNvPr id="8" name="">
             <a:extLst xmlns:a="http://schemas.openxmlformats.org/drawingml/2006/main">
               <a:ext uri="{FF2B5EF4-FFF2-40B4-BE49-F238E27FC236}">
-                <a16:creationId xmlns:a16="http://schemas.microsoft.com/office/drawing/2014/main" id="{8B5D2FC0-C660-4846-AD76-06817C346A7A}"/>
+                <a16:creationId xmlns:a16="http://schemas.microsoft.com/office/drawing/2014/main" id="{63B8E7F8-2C29-4994-9C13-2FFA4FFE2C4C}"/>
               </a:ext>
             </a:extLst>
           </p:cNvPr>
@@ -4731,7 +4731,7 @@
           <p:cNvPr id="9" name="">
             <a:extLst xmlns:a="http://schemas.openxmlformats.org/drawingml/2006/main">
               <a:ext uri="{FF2B5EF4-FFF2-40B4-BE49-F238E27FC236}">
-                <a16:creationId xmlns:a16="http://schemas.microsoft.com/office/drawing/2014/main" id="{C93642D7-353B-455E-AE41-2E6EA5378FC7}"/>
+                <a16:creationId xmlns:a16="http://schemas.microsoft.com/office/drawing/2014/main" id="{86678D39-421A-4344-B9C4-73EE5807BBB2}"/>
               </a:ext>
             </a:extLst>
           </p:cNvPr>
@@ -4788,7 +4788,7 @@
           <p:cNvPr id="10" name="">
             <a:extLst xmlns:a="http://schemas.openxmlformats.org/drawingml/2006/main">
               <a:ext uri="{FF2B5EF4-FFF2-40B4-BE49-F238E27FC236}">
-                <a16:creationId xmlns:a16="http://schemas.microsoft.com/office/drawing/2014/main" id="{B170769D-EB92-48CF-AF1E-2D068C5A9411}"/>
+                <a16:creationId xmlns:a16="http://schemas.microsoft.com/office/drawing/2014/main" id="{D0AF16C6-6B32-4954-9F78-E794A7565469}"/>
               </a:ext>
             </a:extLst>
           </p:cNvPr>
@@ -4822,7 +4822,7 @@
           <p:cNvPr id="11" name="">
             <a:extLst xmlns:a="http://schemas.openxmlformats.org/drawingml/2006/main">
               <a:ext uri="{FF2B5EF4-FFF2-40B4-BE49-F238E27FC236}">
-                <a16:creationId xmlns:a16="http://schemas.microsoft.com/office/drawing/2014/main" id="{4992A564-7A92-4856-BF98-4B8FB6804A0B}"/>
+                <a16:creationId xmlns:a16="http://schemas.microsoft.com/office/drawing/2014/main" id="{B09C6E94-4773-40AA-B616-C6BCAD860B3A}"/>
               </a:ext>
             </a:extLst>
           </p:cNvPr>
@@ -4854,7 +4854,7 @@
           <p:cNvPr id="12" name="">
             <a:extLst xmlns:a="http://schemas.openxmlformats.org/drawingml/2006/main">
               <a:ext uri="{FF2B5EF4-FFF2-40B4-BE49-F238E27FC236}">
-                <a16:creationId xmlns:a16="http://schemas.microsoft.com/office/drawing/2014/main" id="{4DA4E1B7-641A-4DE6-AE6B-8C76D6F85448}"/>
+                <a16:creationId xmlns:a16="http://schemas.microsoft.com/office/drawing/2014/main" id="{44273DC5-5E6F-493E-A1B1-E1DCB333C98F}"/>
               </a:ext>
             </a:extLst>
           </p:cNvPr>
@@ -4911,7 +4911,7 @@
           <p:cNvPr id="13" name="">
             <a:extLst xmlns:a="http://schemas.openxmlformats.org/drawingml/2006/main">
               <a:ext uri="{FF2B5EF4-FFF2-40B4-BE49-F238E27FC236}">
-                <a16:creationId xmlns:a16="http://schemas.microsoft.com/office/drawing/2014/main" id="{949753CE-076D-469E-8EAB-3E8A0F24C71A}"/>
+                <a16:creationId xmlns:a16="http://schemas.microsoft.com/office/drawing/2014/main" id="{3E17C8AB-168F-49EF-8EED-87380E770953}"/>
               </a:ext>
             </a:extLst>
           </p:cNvPr>
@@ -4968,7 +4968,7 @@
           <p:cNvPr id="14" name="">
             <a:extLst xmlns:a="http://schemas.openxmlformats.org/drawingml/2006/main">
               <a:ext uri="{FF2B5EF4-FFF2-40B4-BE49-F238E27FC236}">
-                <a16:creationId xmlns:a16="http://schemas.microsoft.com/office/drawing/2014/main" id="{93835FF4-A6C4-40AB-9F1D-2BB796EDCF5A}"/>
+                <a16:creationId xmlns:a16="http://schemas.microsoft.com/office/drawing/2014/main" id="{163B4BF4-7603-4440-BE4A-7D43D66A6E47}"/>
               </a:ext>
             </a:extLst>
           </p:cNvPr>
@@ -5002,7 +5002,7 @@
           <p:cNvPr id="15" name="">
             <a:extLst xmlns:a="http://schemas.openxmlformats.org/drawingml/2006/main">
               <a:ext uri="{FF2B5EF4-FFF2-40B4-BE49-F238E27FC236}">
-                <a16:creationId xmlns:a16="http://schemas.microsoft.com/office/drawing/2014/main" id="{F7FD48B0-C028-4274-B9F7-C01D5976F54A}"/>
+                <a16:creationId xmlns:a16="http://schemas.microsoft.com/office/drawing/2014/main" id="{8F9DB247-83ED-4693-BC02-66B8ACDC78DA}"/>
               </a:ext>
             </a:extLst>
           </p:cNvPr>
@@ -5034,7 +5034,7 @@
           <p:cNvPr id="16" name="">
             <a:extLst xmlns:a="http://schemas.openxmlformats.org/drawingml/2006/main">
               <a:ext uri="{FF2B5EF4-FFF2-40B4-BE49-F238E27FC236}">
-                <a16:creationId xmlns:a16="http://schemas.microsoft.com/office/drawing/2014/main" id="{02634040-F579-4AFA-AF62-AA1876603DD8}"/>
+                <a16:creationId xmlns:a16="http://schemas.microsoft.com/office/drawing/2014/main" id="{C742A8EE-B612-4F6B-A7BC-2ACA0A9EA4D1}"/>
               </a:ext>
             </a:extLst>
           </p:cNvPr>
@@ -5091,7 +5091,7 @@
           <p:cNvPr id="17" name="">
             <a:extLst xmlns:a="http://schemas.openxmlformats.org/drawingml/2006/main">
               <a:ext uri="{FF2B5EF4-FFF2-40B4-BE49-F238E27FC236}">
-                <a16:creationId xmlns:a16="http://schemas.microsoft.com/office/drawing/2014/main" id="{33CF419F-6BEF-4998-BF02-C0FA1185C19A}"/>
+                <a16:creationId xmlns:a16="http://schemas.microsoft.com/office/drawing/2014/main" id="{BE566D77-1913-4E41-B114-4923B5AB8DC7}"/>
               </a:ext>
             </a:extLst>
           </p:cNvPr>
@@ -5148,7 +5148,7 @@
           <p:cNvPr id="18" name="">
             <a:extLst xmlns:a="http://schemas.openxmlformats.org/drawingml/2006/main">
               <a:ext uri="{FF2B5EF4-FFF2-40B4-BE49-F238E27FC236}">
-                <a16:creationId xmlns:a16="http://schemas.microsoft.com/office/drawing/2014/main" id="{C755A973-ACBD-4415-9992-C0E00012287E}"/>
+                <a16:creationId xmlns:a16="http://schemas.microsoft.com/office/drawing/2014/main" id="{AAE395B4-5AC0-4311-A9B7-38386E07168B}"/>
               </a:ext>
             </a:extLst>
           </p:cNvPr>
@@ -5182,7 +5182,7 @@
           <p:cNvPr id="19" name="">
             <a:extLst xmlns:a="http://schemas.openxmlformats.org/drawingml/2006/main">
               <a:ext uri="{FF2B5EF4-FFF2-40B4-BE49-F238E27FC236}">
-                <a16:creationId xmlns:a16="http://schemas.microsoft.com/office/drawing/2014/main" id="{9E167F09-D4EF-41D4-AF11-B0C06C1ADDD0}"/>
+                <a16:creationId xmlns:a16="http://schemas.microsoft.com/office/drawing/2014/main" id="{AC08604A-8550-4D9F-BE98-0C7578C3658F}"/>
               </a:ext>
             </a:extLst>
           </p:cNvPr>
@@ -5214,7 +5214,7 @@
           <p:cNvPr id="20" name="">
             <a:extLst xmlns:a="http://schemas.openxmlformats.org/drawingml/2006/main">
               <a:ext uri="{FF2B5EF4-FFF2-40B4-BE49-F238E27FC236}">
-                <a16:creationId xmlns:a16="http://schemas.microsoft.com/office/drawing/2014/main" id="{806C3036-FDE9-477D-90A9-8F3C0080AAB7}"/>
+                <a16:creationId xmlns:a16="http://schemas.microsoft.com/office/drawing/2014/main" id="{835A60A2-C855-4AEC-B44A-BF9E61A3F7BA}"/>
               </a:ext>
             </a:extLst>
           </p:cNvPr>
@@ -5271,7 +5271,7 @@
           <p:cNvPr id="21" name="">
             <a:extLst xmlns:a="http://schemas.openxmlformats.org/drawingml/2006/main">
               <a:ext uri="{FF2B5EF4-FFF2-40B4-BE49-F238E27FC236}">
-                <a16:creationId xmlns:a16="http://schemas.microsoft.com/office/drawing/2014/main" id="{47F0C359-BEA2-4D44-B8EF-4B0C2B855DEC}"/>
+                <a16:creationId xmlns:a16="http://schemas.microsoft.com/office/drawing/2014/main" id="{1610E469-6FEE-4B1A-99F7-7206F61B00AD}"/>
               </a:ext>
             </a:extLst>
           </p:cNvPr>
@@ -5328,7 +5328,7 @@
           <p:cNvPr id="22" name="">
             <a:extLst xmlns:a="http://schemas.openxmlformats.org/drawingml/2006/main">
               <a:ext uri="{FF2B5EF4-FFF2-40B4-BE49-F238E27FC236}">
-                <a16:creationId xmlns:a16="http://schemas.microsoft.com/office/drawing/2014/main" id="{CFAAD97C-8001-40BC-8021-639AE84AA4BF}"/>
+                <a16:creationId xmlns:a16="http://schemas.microsoft.com/office/drawing/2014/main" id="{81E54201-CCE3-4B27-AEBE-DC26DBB28602}"/>
               </a:ext>
             </a:extLst>
           </p:cNvPr>
@@ -5383,7 +5383,7 @@
     </p:spTree>
     <p:extLst>
       <p:ext uri="{BB962C8B-B14F-4D97-AF65-F5344CB8AC3E}">
-        <p14:creationId xmlns:p14="http://schemas.microsoft.com/office/powerpoint/2010/main" val="1217899968"/>
+        <p14:creationId xmlns:p14="http://schemas.microsoft.com/office/powerpoint/2010/main" val="1610152902"/>
       </p:ext>
     </p:extLst>
   </p:cSld>
@@ -5584,7 +5584,7 @@
           <p:cNvPr id="23" name="">
             <a:extLst xmlns:a="http://schemas.openxmlformats.org/drawingml/2006/main">
               <a:ext uri="{FF2B5EF4-FFF2-40B4-BE49-F238E27FC236}">
-                <a16:creationId xmlns:a16="http://schemas.microsoft.com/office/drawing/2014/main" id="{ADBFB599-C188-461D-9DEA-E54A623D47EA}"/>
+                <a16:creationId xmlns:a16="http://schemas.microsoft.com/office/drawing/2014/main" id="{01D3C84F-8A3E-49C2-8859-376A8AB60525}"/>
               </a:ext>
             </a:extLst>
           </p:cNvPr>
@@ -5616,7 +5616,7 @@
           <p:cNvPr id="2" name="">
             <a:extLst xmlns:a="http://schemas.openxmlformats.org/drawingml/2006/main">
               <a:ext uri="{FF2B5EF4-FFF2-40B4-BE49-F238E27FC236}">
-                <a16:creationId xmlns:a16="http://schemas.microsoft.com/office/drawing/2014/main" id="{B9A037CB-4F8D-448A-97B4-F68F2D921D28}"/>
+                <a16:creationId xmlns:a16="http://schemas.microsoft.com/office/drawing/2014/main" id="{5AA3CAA9-3A63-4240-90AC-A595FC45E818}"/>
               </a:ext>
             </a:extLst>
           </p:cNvPr>
@@ -5673,7 +5673,7 @@
           <p:cNvPr id="3" name="">
             <a:extLst xmlns:a="http://schemas.openxmlformats.org/drawingml/2006/main">
               <a:ext uri="{FF2B5EF4-FFF2-40B4-BE49-F238E27FC236}">
-                <a16:creationId xmlns:a16="http://schemas.microsoft.com/office/drawing/2014/main" id="{C9002F37-A4B4-4F25-BE59-18E36F6B5CB9}"/>
+                <a16:creationId xmlns:a16="http://schemas.microsoft.com/office/drawing/2014/main" id="{9165A043-878B-4BD0-8479-75873C5783E2}"/>
               </a:ext>
             </a:extLst>
           </p:cNvPr>
@@ -5705,7 +5705,7 @@
           <p:cNvPr id="4" name="">
             <a:extLst xmlns:a="http://schemas.openxmlformats.org/drawingml/2006/main">
               <a:ext uri="{FF2B5EF4-FFF2-40B4-BE49-F238E27FC236}">
-                <a16:creationId xmlns:a16="http://schemas.microsoft.com/office/drawing/2014/main" id="{A63135A9-91A9-4A2A-A33D-F2826BBC948E}"/>
+                <a16:creationId xmlns:a16="http://schemas.microsoft.com/office/drawing/2014/main" id="{44E38002-C20A-480B-98BA-EDA1A7412E52}"/>
               </a:ext>
             </a:extLst>
           </p:cNvPr>
@@ -5762,7 +5762,7 @@
           <p:cNvPr id="5" name="">
             <a:extLst xmlns:a="http://schemas.openxmlformats.org/drawingml/2006/main">
               <a:ext uri="{FF2B5EF4-FFF2-40B4-BE49-F238E27FC236}">
-                <a16:creationId xmlns:a16="http://schemas.microsoft.com/office/drawing/2014/main" id="{28E0F9E6-3456-4E45-8425-46D66013F99E}"/>
+                <a16:creationId xmlns:a16="http://schemas.microsoft.com/office/drawing/2014/main" id="{004D8D0D-0486-45CB-BE8D-E29402B8EE26}"/>
               </a:ext>
             </a:extLst>
           </p:cNvPr>
@@ -5819,7 +5819,7 @@
           <p:cNvPr id="6" name="">
             <a:extLst xmlns:a="http://schemas.openxmlformats.org/drawingml/2006/main">
               <a:ext uri="{FF2B5EF4-FFF2-40B4-BE49-F238E27FC236}">
-                <a16:creationId xmlns:a16="http://schemas.microsoft.com/office/drawing/2014/main" id="{2B74EB4B-D51D-49B5-AEBF-7C24DD91BBFD}"/>
+                <a16:creationId xmlns:a16="http://schemas.microsoft.com/office/drawing/2014/main" id="{5ED8C680-641A-4710-AF8F-582D041DF664}"/>
               </a:ext>
             </a:extLst>
           </p:cNvPr>
@@ -5876,7 +5876,7 @@
           <p:cNvPr id="7" name="">
             <a:extLst xmlns:a="http://schemas.openxmlformats.org/drawingml/2006/main">
               <a:ext uri="{FF2B5EF4-FFF2-40B4-BE49-F238E27FC236}">
-                <a16:creationId xmlns:a16="http://schemas.microsoft.com/office/drawing/2014/main" id="{C115CE0E-B5F0-4E21-AAB6-4A53FBED40A3}"/>
+                <a16:creationId xmlns:a16="http://schemas.microsoft.com/office/drawing/2014/main" id="{4683313F-603F-495B-B24E-3B756E4994A6}"/>
               </a:ext>
             </a:extLst>
           </p:cNvPr>
@@ -5908,7 +5908,7 @@
           <p:cNvPr id="8" name="">
             <a:extLst xmlns:a="http://schemas.openxmlformats.org/drawingml/2006/main">
               <a:ext uri="{FF2B5EF4-FFF2-40B4-BE49-F238E27FC236}">
-                <a16:creationId xmlns:a16="http://schemas.microsoft.com/office/drawing/2014/main" id="{701D9BB9-296B-4396-BFFB-564F73A6BD2E}"/>
+                <a16:creationId xmlns:a16="http://schemas.microsoft.com/office/drawing/2014/main" id="{B0619380-FDB4-4911-84E5-3B9C92C89B1F}"/>
               </a:ext>
             </a:extLst>
           </p:cNvPr>
@@ -5965,7 +5965,7 @@
           <p:cNvPr id="9" name="">
             <a:extLst xmlns:a="http://schemas.openxmlformats.org/drawingml/2006/main">
               <a:ext uri="{FF2B5EF4-FFF2-40B4-BE49-F238E27FC236}">
-                <a16:creationId xmlns:a16="http://schemas.microsoft.com/office/drawing/2014/main" id="{46F72B74-F62F-4A57-B0E2-FD6838E0CDB7}"/>
+                <a16:creationId xmlns:a16="http://schemas.microsoft.com/office/drawing/2014/main" id="{01A7CAE7-2DC0-4FC8-9CF5-3D86CFD93CFE}"/>
               </a:ext>
             </a:extLst>
           </p:cNvPr>
@@ -6022,7 +6022,7 @@
           <p:cNvPr id="10" name="">
             <a:extLst xmlns:a="http://schemas.openxmlformats.org/drawingml/2006/main">
               <a:ext uri="{FF2B5EF4-FFF2-40B4-BE49-F238E27FC236}">
-                <a16:creationId xmlns:a16="http://schemas.microsoft.com/office/drawing/2014/main" id="{6A0B7501-AEF1-49F3-9F88-32EE13401E23}"/>
+                <a16:creationId xmlns:a16="http://schemas.microsoft.com/office/drawing/2014/main" id="{510B7AAB-21ED-4E69-8827-BE59665083C8}"/>
               </a:ext>
             </a:extLst>
           </p:cNvPr>
@@ -6056,7 +6056,7 @@
           <p:cNvPr id="11" name="">
             <a:extLst xmlns:a="http://schemas.openxmlformats.org/drawingml/2006/main">
               <a:ext uri="{FF2B5EF4-FFF2-40B4-BE49-F238E27FC236}">
-                <a16:creationId xmlns:a16="http://schemas.microsoft.com/office/drawing/2014/main" id="{3B4DECA9-ADA6-4F46-83A1-04CD30C3BCED}"/>
+                <a16:creationId xmlns:a16="http://schemas.microsoft.com/office/drawing/2014/main" id="{4FBC70E8-A048-46C0-84A3-90F91B013A5E}"/>
               </a:ext>
             </a:extLst>
           </p:cNvPr>
@@ -6088,7 +6088,7 @@
           <p:cNvPr id="12" name="">
             <a:extLst xmlns:a="http://schemas.openxmlformats.org/drawingml/2006/main">
               <a:ext uri="{FF2B5EF4-FFF2-40B4-BE49-F238E27FC236}">
-                <a16:creationId xmlns:a16="http://schemas.microsoft.com/office/drawing/2014/main" id="{AC8DA8AC-1267-42A2-9820-75A91B2DC3F1}"/>
+                <a16:creationId xmlns:a16="http://schemas.microsoft.com/office/drawing/2014/main" id="{2EF85A16-827C-45DA-8310-51E97D37711F}"/>
               </a:ext>
             </a:extLst>
           </p:cNvPr>
@@ -6145,7 +6145,7 @@
           <p:cNvPr id="13" name="">
             <a:extLst xmlns:a="http://schemas.openxmlformats.org/drawingml/2006/main">
               <a:ext uri="{FF2B5EF4-FFF2-40B4-BE49-F238E27FC236}">
-                <a16:creationId xmlns:a16="http://schemas.microsoft.com/office/drawing/2014/main" id="{6FB6C464-2249-4C1C-B26F-32C5B804E816}"/>
+                <a16:creationId xmlns:a16="http://schemas.microsoft.com/office/drawing/2014/main" id="{DDAC9AF1-8487-4B1A-9200-F6B12384DB00}"/>
               </a:ext>
             </a:extLst>
           </p:cNvPr>
@@ -6202,7 +6202,7 @@
           <p:cNvPr id="14" name="">
             <a:extLst xmlns:a="http://schemas.openxmlformats.org/drawingml/2006/main">
               <a:ext uri="{FF2B5EF4-FFF2-40B4-BE49-F238E27FC236}">
-                <a16:creationId xmlns:a16="http://schemas.microsoft.com/office/drawing/2014/main" id="{D16BF770-DEB5-43FC-9C6A-92A3CCE42774}"/>
+                <a16:creationId xmlns:a16="http://schemas.microsoft.com/office/drawing/2014/main" id="{491E8A5F-E78A-432D-8CAE-D6DDD1283E98}"/>
               </a:ext>
             </a:extLst>
           </p:cNvPr>
@@ -6236,7 +6236,7 @@
           <p:cNvPr id="15" name="">
             <a:extLst xmlns:a="http://schemas.openxmlformats.org/drawingml/2006/main">
               <a:ext uri="{FF2B5EF4-FFF2-40B4-BE49-F238E27FC236}">
-                <a16:creationId xmlns:a16="http://schemas.microsoft.com/office/drawing/2014/main" id="{0919728F-9636-4B5D-AB7C-402D0BD18C23}"/>
+                <a16:creationId xmlns:a16="http://schemas.microsoft.com/office/drawing/2014/main" id="{0DAE3B8C-9186-4CB8-A5EE-18238B6C80D0}"/>
               </a:ext>
             </a:extLst>
           </p:cNvPr>
@@ -6268,7 +6268,7 @@
           <p:cNvPr id="16" name="">
             <a:extLst xmlns:a="http://schemas.openxmlformats.org/drawingml/2006/main">
               <a:ext uri="{FF2B5EF4-FFF2-40B4-BE49-F238E27FC236}">
-                <a16:creationId xmlns:a16="http://schemas.microsoft.com/office/drawing/2014/main" id="{51887E54-FDFA-4F6C-9232-1A8A3C75A9EF}"/>
+                <a16:creationId xmlns:a16="http://schemas.microsoft.com/office/drawing/2014/main" id="{F33B9298-3232-479B-8B30-E735E16257EC}"/>
               </a:ext>
             </a:extLst>
           </p:cNvPr>
@@ -6325,7 +6325,7 @@
           <p:cNvPr id="17" name="">
             <a:extLst xmlns:a="http://schemas.openxmlformats.org/drawingml/2006/main">
               <a:ext uri="{FF2B5EF4-FFF2-40B4-BE49-F238E27FC236}">
-                <a16:creationId xmlns:a16="http://schemas.microsoft.com/office/drawing/2014/main" id="{C3AC8687-ADE1-420B-95A7-2B906E4B4F30}"/>
+                <a16:creationId xmlns:a16="http://schemas.microsoft.com/office/drawing/2014/main" id="{EB9C28EE-35DD-4D31-9E38-8325B333D063}"/>
               </a:ext>
             </a:extLst>
           </p:cNvPr>
@@ -6382,7 +6382,7 @@
           <p:cNvPr id="18" name="">
             <a:extLst xmlns:a="http://schemas.openxmlformats.org/drawingml/2006/main">
               <a:ext uri="{FF2B5EF4-FFF2-40B4-BE49-F238E27FC236}">
-                <a16:creationId xmlns:a16="http://schemas.microsoft.com/office/drawing/2014/main" id="{D83D416B-72F9-4326-A9F0-438E3B36F6A3}"/>
+                <a16:creationId xmlns:a16="http://schemas.microsoft.com/office/drawing/2014/main" id="{D157EBBF-AFED-429F-A20D-969028910BD9}"/>
               </a:ext>
             </a:extLst>
           </p:cNvPr>
@@ -6416,7 +6416,7 @@
           <p:cNvPr id="19" name="">
             <a:extLst xmlns:a="http://schemas.openxmlformats.org/drawingml/2006/main">
               <a:ext uri="{FF2B5EF4-FFF2-40B4-BE49-F238E27FC236}">
-                <a16:creationId xmlns:a16="http://schemas.microsoft.com/office/drawing/2014/main" id="{B33D99DE-9210-4A61-B414-BFDD3A9444F1}"/>
+                <a16:creationId xmlns:a16="http://schemas.microsoft.com/office/drawing/2014/main" id="{ABB5FEC5-0238-409F-8D2A-3E43863FD87A}"/>
               </a:ext>
             </a:extLst>
           </p:cNvPr>
@@ -6448,7 +6448,7 @@
           <p:cNvPr id="20" name="">
             <a:extLst xmlns:a="http://schemas.openxmlformats.org/drawingml/2006/main">
               <a:ext uri="{FF2B5EF4-FFF2-40B4-BE49-F238E27FC236}">
-                <a16:creationId xmlns:a16="http://schemas.microsoft.com/office/drawing/2014/main" id="{EF1AE258-F6E3-428F-963A-E582EAE74BBA}"/>
+                <a16:creationId xmlns:a16="http://schemas.microsoft.com/office/drawing/2014/main" id="{2D03F6DC-DF96-49B2-8F7D-9FD98B5D1388}"/>
               </a:ext>
             </a:extLst>
           </p:cNvPr>
@@ -6505,7 +6505,7 @@
           <p:cNvPr id="21" name="">
             <a:extLst xmlns:a="http://schemas.openxmlformats.org/drawingml/2006/main">
               <a:ext uri="{FF2B5EF4-FFF2-40B4-BE49-F238E27FC236}">
-                <a16:creationId xmlns:a16="http://schemas.microsoft.com/office/drawing/2014/main" id="{49EF509B-D587-42FE-8E29-7118204CBF5B}"/>
+                <a16:creationId xmlns:a16="http://schemas.microsoft.com/office/drawing/2014/main" id="{B064A90F-D1D5-4F37-BDF0-9C9854C0952A}"/>
               </a:ext>
             </a:extLst>
           </p:cNvPr>
@@ -6562,7 +6562,7 @@
           <p:cNvPr id="22" name="">
             <a:extLst xmlns:a="http://schemas.openxmlformats.org/drawingml/2006/main">
               <a:ext uri="{FF2B5EF4-FFF2-40B4-BE49-F238E27FC236}">
-                <a16:creationId xmlns:a16="http://schemas.microsoft.com/office/drawing/2014/main" id="{A9FD599B-BB6F-468E-8BE5-063BA22667E1}"/>
+                <a16:creationId xmlns:a16="http://schemas.microsoft.com/office/drawing/2014/main" id="{4A991425-C518-42BC-865E-A6FFA39F558C}"/>
               </a:ext>
             </a:extLst>
           </p:cNvPr>
@@ -6617,7 +6617,7 @@
     </p:spTree>
     <p:extLst>
       <p:ext uri="{BB962C8B-B14F-4D97-AF65-F5344CB8AC3E}">
-        <p14:creationId xmlns:p14="http://schemas.microsoft.com/office/powerpoint/2010/main" val="385124785"/>
+        <p14:creationId xmlns:p14="http://schemas.microsoft.com/office/powerpoint/2010/main" val="575115593"/>
       </p:ext>
     </p:extLst>
   </p:cSld>
@@ -6818,7 +6818,7 @@
           <p:cNvPr id="16" name="">
             <a:extLst xmlns:a="http://schemas.openxmlformats.org/drawingml/2006/main">
               <a:ext uri="{FF2B5EF4-FFF2-40B4-BE49-F238E27FC236}">
-                <a16:creationId xmlns:a16="http://schemas.microsoft.com/office/drawing/2014/main" id="{A60D50FE-6D16-422E-BA61-152423E18F62}"/>
+                <a16:creationId xmlns:a16="http://schemas.microsoft.com/office/drawing/2014/main" id="{722593C2-7F16-48E3-9099-4357F273C75E}"/>
               </a:ext>
             </a:extLst>
           </p:cNvPr>
@@ -6850,7 +6850,7 @@
           <p:cNvPr id="2" name="">
             <a:extLst xmlns:a="http://schemas.openxmlformats.org/drawingml/2006/main">
               <a:ext uri="{FF2B5EF4-FFF2-40B4-BE49-F238E27FC236}">
-                <a16:creationId xmlns:a16="http://schemas.microsoft.com/office/drawing/2014/main" id="{BE803A84-4263-4DA8-84A6-DC995EB5402C}"/>
+                <a16:creationId xmlns:a16="http://schemas.microsoft.com/office/drawing/2014/main" id="{BECB68FB-82F0-4CF3-84E8-FC4E46DB0E49}"/>
               </a:ext>
             </a:extLst>
           </p:cNvPr>
@@ -6907,7 +6907,7 @@
           <p:cNvPr id="3" name="">
             <a:extLst xmlns:a="http://schemas.openxmlformats.org/drawingml/2006/main">
               <a:ext uri="{FF2B5EF4-FFF2-40B4-BE49-F238E27FC236}">
-                <a16:creationId xmlns:a16="http://schemas.microsoft.com/office/drawing/2014/main" id="{455C4943-30A2-4AEF-A925-7136A9653C31}"/>
+                <a16:creationId xmlns:a16="http://schemas.microsoft.com/office/drawing/2014/main" id="{6CF36D8B-1D40-4F19-AD8C-DF6DEDA4F2D2}"/>
               </a:ext>
             </a:extLst>
           </p:cNvPr>
@@ -6939,7 +6939,7 @@
           <p:cNvPr id="4" name="">
             <a:extLst xmlns:a="http://schemas.openxmlformats.org/drawingml/2006/main">
               <a:ext uri="{FF2B5EF4-FFF2-40B4-BE49-F238E27FC236}">
-                <a16:creationId xmlns:a16="http://schemas.microsoft.com/office/drawing/2014/main" id="{F445B843-717D-4D9E-9E87-C122C2463C66}"/>
+                <a16:creationId xmlns:a16="http://schemas.microsoft.com/office/drawing/2014/main" id="{BB550232-91D0-4512-A7CC-2AB22286684E}"/>
               </a:ext>
             </a:extLst>
           </p:cNvPr>
@@ -6996,7 +6996,7 @@
           <p:cNvPr id="5" name="">
             <a:extLst xmlns:a="http://schemas.openxmlformats.org/drawingml/2006/main">
               <a:ext uri="{FF2B5EF4-FFF2-40B4-BE49-F238E27FC236}">
-                <a16:creationId xmlns:a16="http://schemas.microsoft.com/office/drawing/2014/main" id="{90D2AF89-C2AB-40DC-9351-9409D481E4D2}"/>
+                <a16:creationId xmlns:a16="http://schemas.microsoft.com/office/drawing/2014/main" id="{27568F71-EDB2-4CD5-81B2-7E1A8124CCEC}"/>
               </a:ext>
             </a:extLst>
           </p:cNvPr>
@@ -7053,7 +7053,7 @@
           <p:cNvPr id="6" name="">
             <a:extLst xmlns:a="http://schemas.openxmlformats.org/drawingml/2006/main">
               <a:ext uri="{FF2B5EF4-FFF2-40B4-BE49-F238E27FC236}">
-                <a16:creationId xmlns:a16="http://schemas.microsoft.com/office/drawing/2014/main" id="{5B036C55-3B15-46AE-A9FC-5F6F6C299011}"/>
+                <a16:creationId xmlns:a16="http://schemas.microsoft.com/office/drawing/2014/main" id="{68279A95-E288-4F2A-B3D3-1D90D03E47E3}"/>
               </a:ext>
             </a:extLst>
           </p:cNvPr>
@@ -7110,7 +7110,7 @@
           <p:cNvPr id="7" name="">
             <a:extLst xmlns:a="http://schemas.openxmlformats.org/drawingml/2006/main">
               <a:ext uri="{FF2B5EF4-FFF2-40B4-BE49-F238E27FC236}">
-                <a16:creationId xmlns:a16="http://schemas.microsoft.com/office/drawing/2014/main" id="{863C3038-A37D-4E57-AD6F-33C57439F84A}"/>
+                <a16:creationId xmlns:a16="http://schemas.microsoft.com/office/drawing/2014/main" id="{CF15508B-4411-4A0E-90BD-A9DCBE88AC78}"/>
               </a:ext>
             </a:extLst>
           </p:cNvPr>
@@ -7142,7 +7142,7 @@
           <p:cNvPr id="8" name="">
             <a:extLst xmlns:a="http://schemas.openxmlformats.org/drawingml/2006/main">
               <a:ext uri="{FF2B5EF4-FFF2-40B4-BE49-F238E27FC236}">
-                <a16:creationId xmlns:a16="http://schemas.microsoft.com/office/drawing/2014/main" id="{91B24A76-71C8-456C-B21F-3D0D735D0286}"/>
+                <a16:creationId xmlns:a16="http://schemas.microsoft.com/office/drawing/2014/main" id="{F9E9E07D-C1C9-4081-9D2A-15FF5D59EB09}"/>
               </a:ext>
             </a:extLst>
           </p:cNvPr>
@@ -7199,7 +7199,7 @@
           <p:cNvPr id="9" name="">
             <a:extLst xmlns:a="http://schemas.openxmlformats.org/drawingml/2006/main">
               <a:ext uri="{FF2B5EF4-FFF2-40B4-BE49-F238E27FC236}">
-                <a16:creationId xmlns:a16="http://schemas.microsoft.com/office/drawing/2014/main" id="{FC67A86D-7FE4-4959-A7AB-13671D085582}"/>
+                <a16:creationId xmlns:a16="http://schemas.microsoft.com/office/drawing/2014/main" id="{C51FB377-996F-4937-A90A-D8924EC9B63E}"/>
               </a:ext>
             </a:extLst>
           </p:cNvPr>
@@ -7256,7 +7256,7 @@
           <p:cNvPr id="10" name="">
             <a:extLst xmlns:a="http://schemas.openxmlformats.org/drawingml/2006/main">
               <a:ext uri="{FF2B5EF4-FFF2-40B4-BE49-F238E27FC236}">
-                <a16:creationId xmlns:a16="http://schemas.microsoft.com/office/drawing/2014/main" id="{76026606-D581-4231-BA02-78764C4F9DAB}"/>
+                <a16:creationId xmlns:a16="http://schemas.microsoft.com/office/drawing/2014/main" id="{26C41DB9-EC81-4CB2-A870-1F68102A0384}"/>
               </a:ext>
             </a:extLst>
           </p:cNvPr>
@@ -7313,7 +7313,7 @@
           <p:cNvPr id="11" name="">
             <a:extLst xmlns:a="http://schemas.openxmlformats.org/drawingml/2006/main">
               <a:ext uri="{FF2B5EF4-FFF2-40B4-BE49-F238E27FC236}">
-                <a16:creationId xmlns:a16="http://schemas.microsoft.com/office/drawing/2014/main" id="{D15F0EA4-FF22-44DB-B215-B9B792D628BD}"/>
+                <a16:creationId xmlns:a16="http://schemas.microsoft.com/office/drawing/2014/main" id="{283BB182-54B4-49D3-94F6-EB81206AEB7D}"/>
               </a:ext>
             </a:extLst>
           </p:cNvPr>
@@ -7345,7 +7345,7 @@
           <p:cNvPr id="12" name="">
             <a:extLst xmlns:a="http://schemas.openxmlformats.org/drawingml/2006/main">
               <a:ext uri="{FF2B5EF4-FFF2-40B4-BE49-F238E27FC236}">
-                <a16:creationId xmlns:a16="http://schemas.microsoft.com/office/drawing/2014/main" id="{957AE88F-1D89-4E0F-A3F4-C427926AE823}"/>
+                <a16:creationId xmlns:a16="http://schemas.microsoft.com/office/drawing/2014/main" id="{9F21DD5D-D854-4FE4-ABE3-FC037802BC00}"/>
               </a:ext>
             </a:extLst>
           </p:cNvPr>
@@ -7402,7 +7402,7 @@
           <p:cNvPr id="13" name="">
             <a:extLst xmlns:a="http://schemas.openxmlformats.org/drawingml/2006/main">
               <a:ext uri="{FF2B5EF4-FFF2-40B4-BE49-F238E27FC236}">
-                <a16:creationId xmlns:a16="http://schemas.microsoft.com/office/drawing/2014/main" id="{45588735-390C-4592-B90C-CDCF9489ED3D}"/>
+                <a16:creationId xmlns:a16="http://schemas.microsoft.com/office/drawing/2014/main" id="{7F798B69-8029-43E5-9E9B-AC5398465A6A}"/>
               </a:ext>
             </a:extLst>
           </p:cNvPr>
@@ -7459,7 +7459,7 @@
           <p:cNvPr id="14" name="">
             <a:extLst xmlns:a="http://schemas.openxmlformats.org/drawingml/2006/main">
               <a:ext uri="{FF2B5EF4-FFF2-40B4-BE49-F238E27FC236}">
-                <a16:creationId xmlns:a16="http://schemas.microsoft.com/office/drawing/2014/main" id="{C924C393-1316-4A78-A058-343DD31F8134}"/>
+                <a16:creationId xmlns:a16="http://schemas.microsoft.com/office/drawing/2014/main" id="{9F69B8BD-2AAA-440B-9DA6-6EEAB4C344AB}"/>
               </a:ext>
             </a:extLst>
           </p:cNvPr>
@@ -7516,7 +7516,7 @@
           <p:cNvPr id="15" name="">
             <a:extLst xmlns:a="http://schemas.openxmlformats.org/drawingml/2006/main">
               <a:ext uri="{FF2B5EF4-FFF2-40B4-BE49-F238E27FC236}">
-                <a16:creationId xmlns:a16="http://schemas.microsoft.com/office/drawing/2014/main" id="{ECFA3E17-B642-4762-B242-166A9A1477AE}"/>
+                <a16:creationId xmlns:a16="http://schemas.microsoft.com/office/drawing/2014/main" id="{B638BA9A-77D9-4675-A3C0-271ED108297A}"/>
               </a:ext>
             </a:extLst>
           </p:cNvPr>
@@ -7571,7 +7571,7 @@
     </p:spTree>
     <p:extLst>
       <p:ext uri="{BB962C8B-B14F-4D97-AF65-F5344CB8AC3E}">
-        <p14:creationId xmlns:p14="http://schemas.microsoft.com/office/powerpoint/2010/main" val="1304489337"/>
+        <p14:creationId xmlns:p14="http://schemas.microsoft.com/office/powerpoint/2010/main" val="611849047"/>
       </p:ext>
     </p:extLst>
   </p:cSld>
@@ -7769,10 +7769,10 @@
       </p:grpSpPr>
       <p:sp>
         <p:nvSpPr>
-          <p:cNvPr id="23" name="">
-            <a:extLst xmlns:a="http://schemas.openxmlformats.org/drawingml/2006/main">
-              <a:ext uri="{FF2B5EF4-FFF2-40B4-BE49-F238E27FC236}">
-                <a16:creationId xmlns:a16="http://schemas.microsoft.com/office/drawing/2014/main" id="{400693A8-BF34-4014-8E68-EF2FE0B58A3C}"/>
+          <p:cNvPr id="29" name="">
+            <a:extLst xmlns:a="http://schemas.openxmlformats.org/drawingml/2006/main">
+              <a:ext uri="{FF2B5EF4-FFF2-40B4-BE49-F238E27FC236}">
+                <a16:creationId xmlns:a16="http://schemas.microsoft.com/office/drawing/2014/main" id="{5198F15A-7CF8-41F4-BAF9-62397A254460}"/>
               </a:ext>
             </a:extLst>
           </p:cNvPr>
@@ -7804,7 +7804,7 @@
           <p:cNvPr id="2" name="">
             <a:extLst xmlns:a="http://schemas.openxmlformats.org/drawingml/2006/main">
               <a:ext uri="{FF2B5EF4-FFF2-40B4-BE49-F238E27FC236}">
-                <a16:creationId xmlns:a16="http://schemas.microsoft.com/office/drawing/2014/main" id="{3B79A4B7-6DAC-4446-9730-CC3E43800A5E}"/>
+                <a16:creationId xmlns:a16="http://schemas.microsoft.com/office/drawing/2014/main" id="{D3CE0335-A7EC-4FD6-B6E2-767D50213CB6}"/>
               </a:ext>
             </a:extLst>
           </p:cNvPr>
@@ -7861,7 +7861,7 @@
           <p:cNvPr id="3" name="">
             <a:extLst xmlns:a="http://schemas.openxmlformats.org/drawingml/2006/main">
               <a:ext uri="{FF2B5EF4-FFF2-40B4-BE49-F238E27FC236}">
-                <a16:creationId xmlns:a16="http://schemas.microsoft.com/office/drawing/2014/main" id="{34D5AC3B-A782-41ED-8519-06F839292B8A}"/>
+                <a16:creationId xmlns:a16="http://schemas.microsoft.com/office/drawing/2014/main" id="{9745B798-F058-46C5-9A4D-D2CEC5CAC107}"/>
               </a:ext>
             </a:extLst>
           </p:cNvPr>
@@ -7893,7 +7893,7 @@
           <p:cNvPr id="4" name="">
             <a:extLst xmlns:a="http://schemas.openxmlformats.org/drawingml/2006/main">
               <a:ext uri="{FF2B5EF4-FFF2-40B4-BE49-F238E27FC236}">
-                <a16:creationId xmlns:a16="http://schemas.microsoft.com/office/drawing/2014/main" id="{4F66CB09-BE47-4F36-B9DF-6F1EBAD51D2C}"/>
+                <a16:creationId xmlns:a16="http://schemas.microsoft.com/office/drawing/2014/main" id="{B5B05D3A-04D6-4C97-BB91-17C88D35066E}"/>
               </a:ext>
             </a:extLst>
           </p:cNvPr>
@@ -7950,7 +7950,7 @@
           <p:cNvPr id="5" name="">
             <a:extLst xmlns:a="http://schemas.openxmlformats.org/drawingml/2006/main">
               <a:ext uri="{FF2B5EF4-FFF2-40B4-BE49-F238E27FC236}">
-                <a16:creationId xmlns:a16="http://schemas.microsoft.com/office/drawing/2014/main" id="{14C3285C-F7BF-493E-B5CF-AB375A82D4D8}"/>
+                <a16:creationId xmlns:a16="http://schemas.microsoft.com/office/drawing/2014/main" id="{249EC015-E8A1-4C79-837C-3C219BFA69EE}"/>
               </a:ext>
             </a:extLst>
           </p:cNvPr>
@@ -8007,7 +8007,7 @@
           <p:cNvPr id="6" name="">
             <a:extLst xmlns:a="http://schemas.openxmlformats.org/drawingml/2006/main">
               <a:ext uri="{FF2B5EF4-FFF2-40B4-BE49-F238E27FC236}">
-                <a16:creationId xmlns:a16="http://schemas.microsoft.com/office/drawing/2014/main" id="{4C0CE715-2C44-4EA1-A07F-6119FD0DED17}"/>
+                <a16:creationId xmlns:a16="http://schemas.microsoft.com/office/drawing/2014/main" id="{FB0DB105-10F5-495E-A89E-2364598B3509}"/>
               </a:ext>
             </a:extLst>
           </p:cNvPr>
@@ -8064,7 +8064,7 @@
           <p:cNvPr id="7" name="">
             <a:extLst xmlns:a="http://schemas.openxmlformats.org/drawingml/2006/main">
               <a:ext uri="{FF2B5EF4-FFF2-40B4-BE49-F238E27FC236}">
-                <a16:creationId xmlns:a16="http://schemas.microsoft.com/office/drawing/2014/main" id="{E86B835F-069B-4912-8218-FB309E640D93}"/>
+                <a16:creationId xmlns:a16="http://schemas.microsoft.com/office/drawing/2014/main" id="{FA8A76D6-36AE-4DC4-AC47-23E05A47B4F5}"/>
               </a:ext>
             </a:extLst>
           </p:cNvPr>
@@ -8096,7 +8096,7 @@
           <p:cNvPr id="8" name="">
             <a:extLst xmlns:a="http://schemas.openxmlformats.org/drawingml/2006/main">
               <a:ext uri="{FF2B5EF4-FFF2-40B4-BE49-F238E27FC236}">
-                <a16:creationId xmlns:a16="http://schemas.microsoft.com/office/drawing/2014/main" id="{0455D97B-231F-481E-81BA-C64621198BA8}"/>
+                <a16:creationId xmlns:a16="http://schemas.microsoft.com/office/drawing/2014/main" id="{FAA64620-814B-4813-970A-7F8F34D78F35}"/>
               </a:ext>
             </a:extLst>
           </p:cNvPr>
@@ -8153,7 +8153,7 @@
           <p:cNvPr id="9" name="">
             <a:extLst xmlns:a="http://schemas.openxmlformats.org/drawingml/2006/main">
               <a:ext uri="{FF2B5EF4-FFF2-40B4-BE49-F238E27FC236}">
-                <a16:creationId xmlns:a16="http://schemas.microsoft.com/office/drawing/2014/main" id="{02B9BCDC-E47C-455F-B46C-A320CDADB5FC}"/>
+                <a16:creationId xmlns:a16="http://schemas.microsoft.com/office/drawing/2014/main" id="{5FB6FFFA-B53A-4EA3-AF50-21EFC689D9B9}"/>
               </a:ext>
             </a:extLst>
           </p:cNvPr>
@@ -8210,19 +8210,19 @@
           <p:cNvPr id="10" name="">
             <a:extLst xmlns:a="http://schemas.openxmlformats.org/drawingml/2006/main">
               <a:ext uri="{FF2B5EF4-FFF2-40B4-BE49-F238E27FC236}">
-                <a16:creationId xmlns:a16="http://schemas.microsoft.com/office/drawing/2014/main" id="{63684509-666D-42FD-A813-9AAE56463248}"/>
-              </a:ext>
-            </a:extLst>
-          </p:cNvPr>
-          <p:cNvSpPr>
-            <a:spLocks xmlns:a="http://schemas.openxmlformats.org/drawingml/2006/main" noGrp="1"/>
-          </p:cNvSpPr>
-          <p:nvPr/>
-        </p:nvSpPr>
-        <p:spPr>
-          <a:xfrm xmlns:a="http://schemas.openxmlformats.org/drawingml/2006/main">
-            <a:off x="914400" y="1257300"/>
-            <a:ext cx="10363200" cy="781050"/>
+                <a16:creationId xmlns:a16="http://schemas.microsoft.com/office/drawing/2014/main" id="{5861CF4D-C642-44E5-838A-24B2CA2EBEEF}"/>
+              </a:ext>
+            </a:extLst>
+          </p:cNvPr>
+          <p:cNvSpPr>
+            <a:spLocks xmlns:a="http://schemas.openxmlformats.org/drawingml/2006/main" noGrp="1"/>
+          </p:cNvSpPr>
+          <p:nvPr/>
+        </p:nvSpPr>
+        <p:spPr>
+          <a:xfrm xmlns:a="http://schemas.openxmlformats.org/drawingml/2006/main">
+            <a:off x="857250" y="1219200"/>
+            <a:ext cx="10477500" cy="742950"/>
           </a:xfrm>
           <a:prstGeom xmlns:a="http://schemas.openxmlformats.org/drawingml/2006/main" prst="rect">
             <a:avLst/>
@@ -8239,7 +8239,7 @@
           <a:lstStyle xmlns:a="http://schemas.openxmlformats.org/drawingml/2006/main"/>
           <a:p xmlns:a="http://schemas.openxmlformats.org/drawingml/2006/main">
             <a:pPr algn="ctr">
-              <a:defRPr sz="2175" b="1">
+              <a:defRPr sz="2100" b="1">
                 <a:solidFill>
                   <a:srgbClr val="17253A"/>
                 </a:solidFill>
@@ -8249,7 +8249,7 @@
               </a:defRPr>
             </a:pPr>
             <a:r>
-              <a:rPr sz="2175" b="1">
+              <a:rPr sz="2100" b="1">
                 <a:solidFill>
                   <a:srgbClr val="17253A"/>
                 </a:solidFill>
@@ -8267,28 +8267,30 @@
           <p:cNvPr id="11" name="">
             <a:extLst xmlns:a="http://schemas.openxmlformats.org/drawingml/2006/main">
               <a:ext uri="{FF2B5EF4-FFF2-40B4-BE49-F238E27FC236}">
-                <a16:creationId xmlns:a16="http://schemas.microsoft.com/office/drawing/2014/main" id="{D3656175-59F4-43CB-9737-71C1E398878C}"/>
-              </a:ext>
-            </a:extLst>
-          </p:cNvPr>
-          <p:cNvSpPr>
-            <a:spLocks xmlns:a="http://schemas.openxmlformats.org/drawingml/2006/main" noGrp="1"/>
-          </p:cNvSpPr>
-          <p:nvPr/>
-        </p:nvSpPr>
-        <p:spPr>
-          <a:xfrm xmlns:a="http://schemas.openxmlformats.org/drawingml/2006/main">
-            <a:off x="1000125" y="2247900"/>
-            <a:ext cx="476250" cy="476250"/>
-          </a:xfrm>
-          <a:prstGeom xmlns:a="http://schemas.openxmlformats.org/drawingml/2006/main" prst="ellipse">
+                <a16:creationId xmlns:a16="http://schemas.microsoft.com/office/drawing/2014/main" id="{9296C535-B765-413A-B288-B5679A6A9C9C}"/>
+              </a:ext>
+            </a:extLst>
+          </p:cNvPr>
+          <p:cNvSpPr>
+            <a:spLocks xmlns:a="http://schemas.openxmlformats.org/drawingml/2006/main" noGrp="1"/>
+          </p:cNvSpPr>
+          <p:nvPr/>
+        </p:nvSpPr>
+        <p:spPr>
+          <a:xfrm xmlns:a="http://schemas.openxmlformats.org/drawingml/2006/main">
+            <a:off x="971550" y="2124075"/>
+            <a:ext cx="38100" cy="3524250"/>
+          </a:xfrm>
+          <a:prstGeom xmlns:a="http://schemas.openxmlformats.org/drawingml/2006/main" prst="rect">
             <a:avLst/>
           </a:prstGeom>
           <a:solidFill xmlns:a="http://schemas.openxmlformats.org/drawingml/2006/main">
-            <a:srgbClr val="18324A"/>
+            <a:srgbClr val="2C6E73"/>
           </a:solidFill>
           <a:ln xmlns:a="http://schemas.openxmlformats.org/drawingml/2006/main" w="0">
-            <a:noFill/>
+            <a:solidFill>
+              <a:srgbClr val="2C6E73"/>
+            </a:solidFill>
           </a:ln>
         </p:spPr>
       </p:sp>
@@ -8297,19 +8299,19 @@
           <p:cNvPr id="12" name="">
             <a:extLst xmlns:a="http://schemas.openxmlformats.org/drawingml/2006/main">
               <a:ext uri="{FF2B5EF4-FFF2-40B4-BE49-F238E27FC236}">
-                <a16:creationId xmlns:a16="http://schemas.microsoft.com/office/drawing/2014/main" id="{F1B2BD21-93C4-4D2A-B764-0498B026FCA3}"/>
-              </a:ext>
-            </a:extLst>
-          </p:cNvPr>
-          <p:cNvSpPr>
-            <a:spLocks xmlns:a="http://schemas.openxmlformats.org/drawingml/2006/main" noGrp="1"/>
-          </p:cNvSpPr>
-          <p:nvPr/>
-        </p:nvSpPr>
-        <p:spPr>
-          <a:xfrm xmlns:a="http://schemas.openxmlformats.org/drawingml/2006/main">
-            <a:off x="1000125" y="2276475"/>
-            <a:ext cx="476250" cy="419100"/>
+                <a16:creationId xmlns:a16="http://schemas.microsoft.com/office/drawing/2014/main" id="{102796DA-CDC2-4337-BD92-9F6A32357B79}"/>
+              </a:ext>
+            </a:extLst>
+          </p:cNvPr>
+          <p:cNvSpPr>
+            <a:spLocks xmlns:a="http://schemas.openxmlformats.org/drawingml/2006/main" noGrp="1"/>
+          </p:cNvSpPr>
+          <p:nvPr/>
+        </p:nvSpPr>
+        <p:spPr>
+          <a:xfrm xmlns:a="http://schemas.openxmlformats.org/drawingml/2006/main">
+            <a:off x="1162050" y="2200275"/>
+            <a:ext cx="400050" cy="400050"/>
           </a:xfrm>
           <a:prstGeom xmlns:a="http://schemas.openxmlformats.org/drawingml/2006/main" prst="rect">
             <a:avLst/>
@@ -8326,9 +8328,9 @@
           <a:lstStyle xmlns:a="http://schemas.openxmlformats.org/drawingml/2006/main"/>
           <a:p xmlns:a="http://schemas.openxmlformats.org/drawingml/2006/main">
             <a:pPr algn="ctr">
-              <a:defRPr sz="1350" b="1">
-                <a:solidFill>
-                  <a:srgbClr val="FFFFFF"/>
+              <a:defRPr sz="1125" b="1">
+                <a:solidFill>
+                  <a:srgbClr val="2C6E73"/>
                 </a:solidFill>
                 <a:latin typeface="Arial"/>
                 <a:ea typeface="Arial"/>
@@ -8336,9 +8338,9 @@
               </a:defRPr>
             </a:pPr>
             <a:r>
-              <a:rPr sz="1350" b="1">
-                <a:solidFill>
-                  <a:srgbClr val="FFFFFF"/>
+              <a:rPr sz="1125" b="1">
+                <a:solidFill>
+                  <a:srgbClr val="2C6E73"/>
                 </a:solidFill>
                 <a:latin typeface="Arial"/>
                 <a:ea typeface="Arial"/>
@@ -8354,19 +8356,19 @@
           <p:cNvPr id="13" name="">
             <a:extLst xmlns:a="http://schemas.openxmlformats.org/drawingml/2006/main">
               <a:ext uri="{FF2B5EF4-FFF2-40B4-BE49-F238E27FC236}">
-                <a16:creationId xmlns:a16="http://schemas.microsoft.com/office/drawing/2014/main" id="{50C115E5-FFD7-432B-BAD3-9D08A9C37CBB}"/>
-              </a:ext>
-            </a:extLst>
-          </p:cNvPr>
-          <p:cNvSpPr>
-            <a:spLocks xmlns:a="http://schemas.openxmlformats.org/drawingml/2006/main" noGrp="1"/>
-          </p:cNvSpPr>
-          <p:nvPr/>
-        </p:nvSpPr>
-        <p:spPr>
-          <a:xfrm xmlns:a="http://schemas.openxmlformats.org/drawingml/2006/main">
-            <a:off x="1714500" y="2181225"/>
-            <a:ext cx="9429750" cy="609600"/>
+                <a16:creationId xmlns:a16="http://schemas.microsoft.com/office/drawing/2014/main" id="{CAEECDFF-61CE-40E3-A5CC-06D7073D1E9E}"/>
+              </a:ext>
+            </a:extLst>
+          </p:cNvPr>
+          <p:cNvSpPr>
+            <a:spLocks xmlns:a="http://schemas.openxmlformats.org/drawingml/2006/main" noGrp="1"/>
+          </p:cNvSpPr>
+          <p:nvPr/>
+        </p:nvSpPr>
+        <p:spPr>
+          <a:xfrm xmlns:a="http://schemas.openxmlformats.org/drawingml/2006/main">
+            <a:off x="1714500" y="2114550"/>
+            <a:ext cx="9525000" cy="514350"/>
           </a:xfrm>
           <a:prstGeom xmlns:a="http://schemas.openxmlformats.org/drawingml/2006/main" prst="rect">
             <a:avLst/>
@@ -8383,7 +8385,7 @@
           <a:lstStyle xmlns:a="http://schemas.openxmlformats.org/drawingml/2006/main"/>
           <a:p xmlns:a="http://schemas.openxmlformats.org/drawingml/2006/main">
             <a:pPr algn="l">
-              <a:defRPr sz="1500" b="0">
+              <a:defRPr sz="1350" b="0">
                 <a:solidFill>
                   <a:srgbClr val="17253A"/>
                 </a:solidFill>
@@ -8393,7 +8395,7 @@
               </a:defRPr>
             </a:pPr>
             <a:r>
-              <a:rPr sz="1500" b="0">
+              <a:rPr sz="1350" b="0">
                 <a:solidFill>
                   <a:srgbClr val="17253A"/>
                 </a:solidFill>
@@ -8401,7 +8403,7 @@
                 <a:ea typeface="Arial"/>
                 <a:cs typeface="Arial"/>
               </a:rPr>
-              <a:t>Identify the structure: Estimate the quotient using a nearby multiple.</a:t>
+              <a:t>36 times table: 36, 72, 108, 144, 180, 216, 252, 288, 324</a:t>
             </a:r>
           </a:p>
         </p:txBody>
@@ -8411,28 +8413,30 @@
           <p:cNvPr id="14" name="">
             <a:extLst xmlns:a="http://schemas.openxmlformats.org/drawingml/2006/main">
               <a:ext uri="{FF2B5EF4-FFF2-40B4-BE49-F238E27FC236}">
-                <a16:creationId xmlns:a16="http://schemas.microsoft.com/office/drawing/2014/main" id="{52CE712C-D61A-46DA-B512-9C2A894EB7AE}"/>
-              </a:ext>
-            </a:extLst>
-          </p:cNvPr>
-          <p:cNvSpPr>
-            <a:spLocks xmlns:a="http://schemas.openxmlformats.org/drawingml/2006/main" noGrp="1"/>
-          </p:cNvSpPr>
-          <p:nvPr/>
-        </p:nvSpPr>
-        <p:spPr>
-          <a:xfrm xmlns:a="http://schemas.openxmlformats.org/drawingml/2006/main">
-            <a:off x="1000125" y="2990850"/>
-            <a:ext cx="476250" cy="476250"/>
-          </a:xfrm>
-          <a:prstGeom xmlns:a="http://schemas.openxmlformats.org/drawingml/2006/main" prst="ellipse">
+                <a16:creationId xmlns:a16="http://schemas.microsoft.com/office/drawing/2014/main" id="{9A52ECA7-AA0E-4C31-8D4B-4BFADA35EE6E}"/>
+              </a:ext>
+            </a:extLst>
+          </p:cNvPr>
+          <p:cNvSpPr>
+            <a:spLocks xmlns:a="http://schemas.openxmlformats.org/drawingml/2006/main" noGrp="1"/>
+          </p:cNvSpPr>
+          <p:nvPr/>
+        </p:nvSpPr>
+        <p:spPr>
+          <a:xfrm xmlns:a="http://schemas.openxmlformats.org/drawingml/2006/main">
+            <a:off x="1714500" y="2647950"/>
+            <a:ext cx="9334500" cy="9525"/>
+          </a:xfrm>
+          <a:prstGeom xmlns:a="http://schemas.openxmlformats.org/drawingml/2006/main" prst="rect">
             <a:avLst/>
           </a:prstGeom>
           <a:solidFill xmlns:a="http://schemas.openxmlformats.org/drawingml/2006/main">
-            <a:srgbClr val="2C6E73"/>
+            <a:srgbClr val="D9E0E6"/>
           </a:solidFill>
           <a:ln xmlns:a="http://schemas.openxmlformats.org/drawingml/2006/main" w="0">
-            <a:noFill/>
+            <a:solidFill>
+              <a:srgbClr val="D9E0E6"/>
+            </a:solidFill>
           </a:ln>
         </p:spPr>
       </p:sp>
@@ -8441,19 +8445,19 @@
           <p:cNvPr id="15" name="">
             <a:extLst xmlns:a="http://schemas.openxmlformats.org/drawingml/2006/main">
               <a:ext uri="{FF2B5EF4-FFF2-40B4-BE49-F238E27FC236}">
-                <a16:creationId xmlns:a16="http://schemas.microsoft.com/office/drawing/2014/main" id="{06FBD958-0430-4D0E-84A3-4CFAF6756F98}"/>
-              </a:ext>
-            </a:extLst>
-          </p:cNvPr>
-          <p:cNvSpPr>
-            <a:spLocks xmlns:a="http://schemas.openxmlformats.org/drawingml/2006/main" noGrp="1"/>
-          </p:cNvSpPr>
-          <p:nvPr/>
-        </p:nvSpPr>
-        <p:spPr>
-          <a:xfrm xmlns:a="http://schemas.openxmlformats.org/drawingml/2006/main">
-            <a:off x="1000125" y="3019425"/>
-            <a:ext cx="476250" cy="419100"/>
+                <a16:creationId xmlns:a16="http://schemas.microsoft.com/office/drawing/2014/main" id="{A88434F5-7365-405C-B91A-840ECD445810}"/>
+              </a:ext>
+            </a:extLst>
+          </p:cNvPr>
+          <p:cNvSpPr>
+            <a:spLocks xmlns:a="http://schemas.openxmlformats.org/drawingml/2006/main" noGrp="1"/>
+          </p:cNvSpPr>
+          <p:nvPr/>
+        </p:nvSpPr>
+        <p:spPr>
+          <a:xfrm xmlns:a="http://schemas.openxmlformats.org/drawingml/2006/main">
+            <a:off x="1162050" y="2781300"/>
+            <a:ext cx="400050" cy="400050"/>
           </a:xfrm>
           <a:prstGeom xmlns:a="http://schemas.openxmlformats.org/drawingml/2006/main" prst="rect">
             <a:avLst/>
@@ -8470,9 +8474,9 @@
           <a:lstStyle xmlns:a="http://schemas.openxmlformats.org/drawingml/2006/main"/>
           <a:p xmlns:a="http://schemas.openxmlformats.org/drawingml/2006/main">
             <a:pPr algn="ctr">
-              <a:defRPr sz="1350" b="1">
-                <a:solidFill>
-                  <a:srgbClr val="FFFFFF"/>
+              <a:defRPr sz="1125" b="1">
+                <a:solidFill>
+                  <a:srgbClr val="2C6E73"/>
                 </a:solidFill>
                 <a:latin typeface="Arial"/>
                 <a:ea typeface="Arial"/>
@@ -8480,9 +8484,9 @@
               </a:defRPr>
             </a:pPr>
             <a:r>
-              <a:rPr sz="1350" b="1">
-                <a:solidFill>
-                  <a:srgbClr val="FFFFFF"/>
+              <a:rPr sz="1125" b="1">
+                <a:solidFill>
+                  <a:srgbClr val="2C6E73"/>
                 </a:solidFill>
                 <a:latin typeface="Arial"/>
                 <a:ea typeface="Arial"/>
@@ -8498,19 +8502,19 @@
           <p:cNvPr id="16" name="">
             <a:extLst xmlns:a="http://schemas.openxmlformats.org/drawingml/2006/main">
               <a:ext uri="{FF2B5EF4-FFF2-40B4-BE49-F238E27FC236}">
-                <a16:creationId xmlns:a16="http://schemas.microsoft.com/office/drawing/2014/main" id="{4755D458-16CA-410A-A200-E03B09996E6D}"/>
-              </a:ext>
-            </a:extLst>
-          </p:cNvPr>
-          <p:cNvSpPr>
-            <a:spLocks xmlns:a="http://schemas.openxmlformats.org/drawingml/2006/main" noGrp="1"/>
-          </p:cNvSpPr>
-          <p:nvPr/>
-        </p:nvSpPr>
-        <p:spPr>
-          <a:xfrm xmlns:a="http://schemas.openxmlformats.org/drawingml/2006/main">
-            <a:off x="1714500" y="2924175"/>
-            <a:ext cx="9429750" cy="609600"/>
+                <a16:creationId xmlns:a16="http://schemas.microsoft.com/office/drawing/2014/main" id="{FA01CBA7-698C-4DE9-973E-F380ECD6C590}"/>
+              </a:ext>
+            </a:extLst>
+          </p:cNvPr>
+          <p:cNvSpPr>
+            <a:spLocks xmlns:a="http://schemas.openxmlformats.org/drawingml/2006/main" noGrp="1"/>
+          </p:cNvSpPr>
+          <p:nvPr/>
+        </p:nvSpPr>
+        <p:spPr>
+          <a:xfrm xmlns:a="http://schemas.openxmlformats.org/drawingml/2006/main">
+            <a:off x="1714500" y="2695575"/>
+            <a:ext cx="9525000" cy="514350"/>
           </a:xfrm>
           <a:prstGeom xmlns:a="http://schemas.openxmlformats.org/drawingml/2006/main" prst="rect">
             <a:avLst/>
@@ -8527,7 +8531,7 @@
           <a:lstStyle xmlns:a="http://schemas.openxmlformats.org/drawingml/2006/main"/>
           <a:p xmlns:a="http://schemas.openxmlformats.org/drawingml/2006/main">
             <a:pPr algn="l">
-              <a:defRPr sz="1500" b="0">
+              <a:defRPr sz="1350" b="0">
                 <a:solidFill>
                   <a:srgbClr val="17253A"/>
                 </a:solidFill>
@@ -8537,7 +8541,7 @@
               </a:defRPr>
             </a:pPr>
             <a:r>
-              <a:rPr sz="1500" b="0">
+              <a:rPr sz="1350" b="0">
                 <a:solidFill>
                   <a:srgbClr val="17253A"/>
                 </a:solidFill>
@@ -8545,7 +8549,7 @@
                 <a:ea typeface="Arial"/>
                 <a:cs typeface="Arial"/>
               </a:rPr>
-              <a:t>Set up the method: Divide one place at a time and record any remainder or exchange.</a:t>
+              <a:t>93 ÷ 36: choose 72 = 36 × 2; write 2</a:t>
             </a:r>
           </a:p>
         </p:txBody>
@@ -8555,28 +8559,30 @@
           <p:cNvPr id="17" name="">
             <a:extLst xmlns:a="http://schemas.openxmlformats.org/drawingml/2006/main">
               <a:ext uri="{FF2B5EF4-FFF2-40B4-BE49-F238E27FC236}">
-                <a16:creationId xmlns:a16="http://schemas.microsoft.com/office/drawing/2014/main" id="{0DBF142D-A595-4486-930F-9C144DC058D9}"/>
-              </a:ext>
-            </a:extLst>
-          </p:cNvPr>
-          <p:cNvSpPr>
-            <a:spLocks xmlns:a="http://schemas.openxmlformats.org/drawingml/2006/main" noGrp="1"/>
-          </p:cNvSpPr>
-          <p:nvPr/>
-        </p:nvSpPr>
-        <p:spPr>
-          <a:xfrm xmlns:a="http://schemas.openxmlformats.org/drawingml/2006/main">
-            <a:off x="1000125" y="3733800"/>
-            <a:ext cx="476250" cy="476250"/>
-          </a:xfrm>
-          <a:prstGeom xmlns:a="http://schemas.openxmlformats.org/drawingml/2006/main" prst="ellipse">
+                <a16:creationId xmlns:a16="http://schemas.microsoft.com/office/drawing/2014/main" id="{08E77F07-8037-453C-9D2A-7526B3F66633}"/>
+              </a:ext>
+            </a:extLst>
+          </p:cNvPr>
+          <p:cNvSpPr>
+            <a:spLocks xmlns:a="http://schemas.openxmlformats.org/drawingml/2006/main" noGrp="1"/>
+          </p:cNvSpPr>
+          <p:nvPr/>
+        </p:nvSpPr>
+        <p:spPr>
+          <a:xfrm xmlns:a="http://schemas.openxmlformats.org/drawingml/2006/main">
+            <a:off x="1714500" y="3228975"/>
+            <a:ext cx="9334500" cy="9525"/>
+          </a:xfrm>
+          <a:prstGeom xmlns:a="http://schemas.openxmlformats.org/drawingml/2006/main" prst="rect">
             <a:avLst/>
           </a:prstGeom>
           <a:solidFill xmlns:a="http://schemas.openxmlformats.org/drawingml/2006/main">
-            <a:srgbClr val="2C6E73"/>
+            <a:srgbClr val="D9E0E6"/>
           </a:solidFill>
           <a:ln xmlns:a="http://schemas.openxmlformats.org/drawingml/2006/main" w="0">
-            <a:noFill/>
+            <a:solidFill>
+              <a:srgbClr val="D9E0E6"/>
+            </a:solidFill>
           </a:ln>
         </p:spPr>
       </p:sp>
@@ -8585,19 +8591,19 @@
           <p:cNvPr id="18" name="">
             <a:extLst xmlns:a="http://schemas.openxmlformats.org/drawingml/2006/main">
               <a:ext uri="{FF2B5EF4-FFF2-40B4-BE49-F238E27FC236}">
-                <a16:creationId xmlns:a16="http://schemas.microsoft.com/office/drawing/2014/main" id="{96AF568A-9DCB-4BCC-99B0-402FC5AAA0BD}"/>
-              </a:ext>
-            </a:extLst>
-          </p:cNvPr>
-          <p:cNvSpPr>
-            <a:spLocks xmlns:a="http://schemas.openxmlformats.org/drawingml/2006/main" noGrp="1"/>
-          </p:cNvSpPr>
-          <p:nvPr/>
-        </p:nvSpPr>
-        <p:spPr>
-          <a:xfrm xmlns:a="http://schemas.openxmlformats.org/drawingml/2006/main">
-            <a:off x="1000125" y="3762375"/>
-            <a:ext cx="476250" cy="419100"/>
+                <a16:creationId xmlns:a16="http://schemas.microsoft.com/office/drawing/2014/main" id="{20D80151-716C-406B-912F-1D5F867202EE}"/>
+              </a:ext>
+            </a:extLst>
+          </p:cNvPr>
+          <p:cNvSpPr>
+            <a:spLocks xmlns:a="http://schemas.openxmlformats.org/drawingml/2006/main" noGrp="1"/>
+          </p:cNvSpPr>
+          <p:nvPr/>
+        </p:nvSpPr>
+        <p:spPr>
+          <a:xfrm xmlns:a="http://schemas.openxmlformats.org/drawingml/2006/main">
+            <a:off x="1162050" y="3362325"/>
+            <a:ext cx="400050" cy="400050"/>
           </a:xfrm>
           <a:prstGeom xmlns:a="http://schemas.openxmlformats.org/drawingml/2006/main" prst="rect">
             <a:avLst/>
@@ -8614,9 +8620,9 @@
           <a:lstStyle xmlns:a="http://schemas.openxmlformats.org/drawingml/2006/main"/>
           <a:p xmlns:a="http://schemas.openxmlformats.org/drawingml/2006/main">
             <a:pPr algn="ctr">
-              <a:defRPr sz="1350" b="1">
-                <a:solidFill>
-                  <a:srgbClr val="FFFFFF"/>
+              <a:defRPr sz="1125" b="1">
+                <a:solidFill>
+                  <a:srgbClr val="2C6E73"/>
                 </a:solidFill>
                 <a:latin typeface="Arial"/>
                 <a:ea typeface="Arial"/>
@@ -8624,9 +8630,9 @@
               </a:defRPr>
             </a:pPr>
             <a:r>
-              <a:rPr sz="1350" b="1">
-                <a:solidFill>
-                  <a:srgbClr val="FFFFFF"/>
+              <a:rPr sz="1125" b="1">
+                <a:solidFill>
+                  <a:srgbClr val="2C6E73"/>
                 </a:solidFill>
                 <a:latin typeface="Arial"/>
                 <a:ea typeface="Arial"/>
@@ -8642,19 +8648,19 @@
           <p:cNvPr id="19" name="">
             <a:extLst xmlns:a="http://schemas.openxmlformats.org/drawingml/2006/main">
               <a:ext uri="{FF2B5EF4-FFF2-40B4-BE49-F238E27FC236}">
-                <a16:creationId xmlns:a16="http://schemas.microsoft.com/office/drawing/2014/main" id="{E54F8ADF-DFBF-46C6-A7C7-E2C8FCC3B979}"/>
-              </a:ext>
-            </a:extLst>
-          </p:cNvPr>
-          <p:cNvSpPr>
-            <a:spLocks xmlns:a="http://schemas.openxmlformats.org/drawingml/2006/main" noGrp="1"/>
-          </p:cNvSpPr>
-          <p:nvPr/>
-        </p:nvSpPr>
-        <p:spPr>
-          <a:xfrm xmlns:a="http://schemas.openxmlformats.org/drawingml/2006/main">
-            <a:off x="1714500" y="3667125"/>
-            <a:ext cx="9429750" cy="609600"/>
+                <a16:creationId xmlns:a16="http://schemas.microsoft.com/office/drawing/2014/main" id="{36036A38-360D-4ADF-AFD3-A64B4B63F498}"/>
+              </a:ext>
+            </a:extLst>
+          </p:cNvPr>
+          <p:cNvSpPr>
+            <a:spLocks xmlns:a="http://schemas.openxmlformats.org/drawingml/2006/main" noGrp="1"/>
+          </p:cNvSpPr>
+          <p:nvPr/>
+        </p:nvSpPr>
+        <p:spPr>
+          <a:xfrm xmlns:a="http://schemas.openxmlformats.org/drawingml/2006/main">
+            <a:off x="1714500" y="3276600"/>
+            <a:ext cx="9525000" cy="514350"/>
           </a:xfrm>
           <a:prstGeom xmlns:a="http://schemas.openxmlformats.org/drawingml/2006/main" prst="rect">
             <a:avLst/>
@@ -8671,7 +8677,7 @@
           <a:lstStyle xmlns:a="http://schemas.openxmlformats.org/drawingml/2006/main"/>
           <a:p xmlns:a="http://schemas.openxmlformats.org/drawingml/2006/main">
             <a:pPr algn="l">
-              <a:defRPr sz="1500" b="0">
+              <a:defRPr sz="1350" b="0">
                 <a:solidFill>
                   <a:srgbClr val="17253A"/>
                 </a:solidFill>
@@ -8681,7 +8687,7 @@
               </a:defRPr>
             </a:pPr>
             <a:r>
-              <a:rPr sz="1500" b="0">
+              <a:rPr sz="1350" b="0">
                 <a:solidFill>
                   <a:srgbClr val="17253A"/>
                 </a:solidFill>
@@ -8689,7 +8695,7 @@
                 <a:ea typeface="Arial"/>
                 <a:cs typeface="Arial"/>
               </a:rPr>
-              <a:t>Complete the calculation: 260.</a:t>
+              <a:t>93 - 72 = 21; bring down 6 → 216; choose 216; write 6</a:t>
             </a:r>
           </a:p>
         </p:txBody>
@@ -8699,28 +8705,30 @@
           <p:cNvPr id="20" name="">
             <a:extLst xmlns:a="http://schemas.openxmlformats.org/drawingml/2006/main">
               <a:ext uri="{FF2B5EF4-FFF2-40B4-BE49-F238E27FC236}">
-                <a16:creationId xmlns:a16="http://schemas.microsoft.com/office/drawing/2014/main" id="{4141569B-89A8-41DD-A415-7AAADD6FDF25}"/>
-              </a:ext>
-            </a:extLst>
-          </p:cNvPr>
-          <p:cNvSpPr>
-            <a:spLocks xmlns:a="http://schemas.openxmlformats.org/drawingml/2006/main" noGrp="1"/>
-          </p:cNvSpPr>
-          <p:nvPr/>
-        </p:nvSpPr>
-        <p:spPr>
-          <a:xfrm xmlns:a="http://schemas.openxmlformats.org/drawingml/2006/main">
-            <a:off x="1000125" y="4476750"/>
-            <a:ext cx="476250" cy="476250"/>
-          </a:xfrm>
-          <a:prstGeom xmlns:a="http://schemas.openxmlformats.org/drawingml/2006/main" prst="ellipse">
+                <a16:creationId xmlns:a16="http://schemas.microsoft.com/office/drawing/2014/main" id="{F42B1BEF-92B8-4F21-A5DA-63698793AF69}"/>
+              </a:ext>
+            </a:extLst>
+          </p:cNvPr>
+          <p:cNvSpPr>
+            <a:spLocks xmlns:a="http://schemas.openxmlformats.org/drawingml/2006/main" noGrp="1"/>
+          </p:cNvSpPr>
+          <p:nvPr/>
+        </p:nvSpPr>
+        <p:spPr>
+          <a:xfrm xmlns:a="http://schemas.openxmlformats.org/drawingml/2006/main">
+            <a:off x="1714500" y="3810000"/>
+            <a:ext cx="9334500" cy="9525"/>
+          </a:xfrm>
+          <a:prstGeom xmlns:a="http://schemas.openxmlformats.org/drawingml/2006/main" prst="rect">
             <a:avLst/>
           </a:prstGeom>
           <a:solidFill xmlns:a="http://schemas.openxmlformats.org/drawingml/2006/main">
-            <a:srgbClr val="2C6E73"/>
+            <a:srgbClr val="D9E0E6"/>
           </a:solidFill>
           <a:ln xmlns:a="http://schemas.openxmlformats.org/drawingml/2006/main" w="0">
-            <a:noFill/>
+            <a:solidFill>
+              <a:srgbClr val="D9E0E6"/>
+            </a:solidFill>
           </a:ln>
         </p:spPr>
       </p:sp>
@@ -8729,19 +8737,19 @@
           <p:cNvPr id="21" name="">
             <a:extLst xmlns:a="http://schemas.openxmlformats.org/drawingml/2006/main">
               <a:ext uri="{FF2B5EF4-FFF2-40B4-BE49-F238E27FC236}">
-                <a16:creationId xmlns:a16="http://schemas.microsoft.com/office/drawing/2014/main" id="{A1673C24-65AF-4DC3-B4D5-18C7F8EDB370}"/>
-              </a:ext>
-            </a:extLst>
-          </p:cNvPr>
-          <p:cNvSpPr>
-            <a:spLocks xmlns:a="http://schemas.openxmlformats.org/drawingml/2006/main" noGrp="1"/>
-          </p:cNvSpPr>
-          <p:nvPr/>
-        </p:nvSpPr>
-        <p:spPr>
-          <a:xfrm xmlns:a="http://schemas.openxmlformats.org/drawingml/2006/main">
-            <a:off x="1000125" y="4505325"/>
-            <a:ext cx="476250" cy="419100"/>
+                <a16:creationId xmlns:a16="http://schemas.microsoft.com/office/drawing/2014/main" id="{7605E157-1119-42A2-8222-73B244F4BD2B}"/>
+              </a:ext>
+            </a:extLst>
+          </p:cNvPr>
+          <p:cNvSpPr>
+            <a:spLocks xmlns:a="http://schemas.openxmlformats.org/drawingml/2006/main" noGrp="1"/>
+          </p:cNvSpPr>
+          <p:nvPr/>
+        </p:nvSpPr>
+        <p:spPr>
+          <a:xfrm xmlns:a="http://schemas.openxmlformats.org/drawingml/2006/main">
+            <a:off x="1162050" y="3943350"/>
+            <a:ext cx="400050" cy="400050"/>
           </a:xfrm>
           <a:prstGeom xmlns:a="http://schemas.openxmlformats.org/drawingml/2006/main" prst="rect">
             <a:avLst/>
@@ -8758,9 +8766,9 @@
           <a:lstStyle xmlns:a="http://schemas.openxmlformats.org/drawingml/2006/main"/>
           <a:p xmlns:a="http://schemas.openxmlformats.org/drawingml/2006/main">
             <a:pPr algn="ctr">
-              <a:defRPr sz="1350" b="1">
-                <a:solidFill>
-                  <a:srgbClr val="FFFFFF"/>
+              <a:defRPr sz="1125" b="1">
+                <a:solidFill>
+                  <a:srgbClr val="2C6E73"/>
                 </a:solidFill>
                 <a:latin typeface="Arial"/>
                 <a:ea typeface="Arial"/>
@@ -8768,9 +8776,9 @@
               </a:defRPr>
             </a:pPr>
             <a:r>
-              <a:rPr sz="1350" b="1">
-                <a:solidFill>
-                  <a:srgbClr val="FFFFFF"/>
+              <a:rPr sz="1125" b="1">
+                <a:solidFill>
+                  <a:srgbClr val="2C6E73"/>
                 </a:solidFill>
                 <a:latin typeface="Arial"/>
                 <a:ea typeface="Arial"/>
@@ -8786,19 +8794,19 @@
           <p:cNvPr id="22" name="">
             <a:extLst xmlns:a="http://schemas.openxmlformats.org/drawingml/2006/main">
               <a:ext uri="{FF2B5EF4-FFF2-40B4-BE49-F238E27FC236}">
-                <a16:creationId xmlns:a16="http://schemas.microsoft.com/office/drawing/2014/main" id="{8DE6979A-CE7F-47D9-B03C-B04C2EB74A65}"/>
-              </a:ext>
-            </a:extLst>
-          </p:cNvPr>
-          <p:cNvSpPr>
-            <a:spLocks xmlns:a="http://schemas.openxmlformats.org/drawingml/2006/main" noGrp="1"/>
-          </p:cNvSpPr>
-          <p:nvPr/>
-        </p:nvSpPr>
-        <p:spPr>
-          <a:xfrm xmlns:a="http://schemas.openxmlformats.org/drawingml/2006/main">
-            <a:off x="1714500" y="4410075"/>
-            <a:ext cx="9429750" cy="609600"/>
+                <a16:creationId xmlns:a16="http://schemas.microsoft.com/office/drawing/2014/main" id="{DBD226BC-2C9B-49F5-ADDF-92F856A86158}"/>
+              </a:ext>
+            </a:extLst>
+          </p:cNvPr>
+          <p:cNvSpPr>
+            <a:spLocks xmlns:a="http://schemas.openxmlformats.org/drawingml/2006/main" noGrp="1"/>
+          </p:cNvSpPr>
+          <p:nvPr/>
+        </p:nvSpPr>
+        <p:spPr>
+          <a:xfrm xmlns:a="http://schemas.openxmlformats.org/drawingml/2006/main">
+            <a:off x="1714500" y="3857625"/>
+            <a:ext cx="9525000" cy="514350"/>
           </a:xfrm>
           <a:prstGeom xmlns:a="http://schemas.openxmlformats.org/drawingml/2006/main" prst="rect">
             <a:avLst/>
@@ -8815,9 +8823,9 @@
           <a:lstStyle xmlns:a="http://schemas.openxmlformats.org/drawingml/2006/main"/>
           <a:p xmlns:a="http://schemas.openxmlformats.org/drawingml/2006/main">
             <a:pPr algn="l">
-              <a:defRPr sz="1500" b="1">
-                <a:solidFill>
-                  <a:srgbClr val="2F785D"/>
+              <a:defRPr sz="1350" b="0">
+                <a:solidFill>
+                  <a:srgbClr val="17253A"/>
                 </a:solidFill>
                 <a:latin typeface="Arial"/>
                 <a:ea typeface="Arial"/>
@@ -8825,15 +8833,307 @@
               </a:defRPr>
             </a:pPr>
             <a:r>
-              <a:rPr sz="1500" b="1">
+              <a:rPr sz="1350" b="0">
+                <a:solidFill>
+                  <a:srgbClr val="17253A"/>
+                </a:solidFill>
+                <a:latin typeface="Arial"/>
+                <a:ea typeface="Arial"/>
+                <a:cs typeface="Arial"/>
+              </a:rPr>
+              <a:t>216 - 216 = 0; bring down 0; write 0</a:t>
+            </a:r>
+          </a:p>
+        </p:txBody>
+      </p:sp>
+      <p:sp>
+        <p:nvSpPr>
+          <p:cNvPr id="23" name="">
+            <a:extLst xmlns:a="http://schemas.openxmlformats.org/drawingml/2006/main">
+              <a:ext uri="{FF2B5EF4-FFF2-40B4-BE49-F238E27FC236}">
+                <a16:creationId xmlns:a16="http://schemas.microsoft.com/office/drawing/2014/main" id="{B4BAFA8D-155E-41A6-95D9-FF7477B6C5E6}"/>
+              </a:ext>
+            </a:extLst>
+          </p:cNvPr>
+          <p:cNvSpPr>
+            <a:spLocks xmlns:a="http://schemas.openxmlformats.org/drawingml/2006/main" noGrp="1"/>
+          </p:cNvSpPr>
+          <p:nvPr/>
+        </p:nvSpPr>
+        <p:spPr>
+          <a:xfrm xmlns:a="http://schemas.openxmlformats.org/drawingml/2006/main">
+            <a:off x="1714500" y="4391025"/>
+            <a:ext cx="9334500" cy="9525"/>
+          </a:xfrm>
+          <a:prstGeom xmlns:a="http://schemas.openxmlformats.org/drawingml/2006/main" prst="rect">
+            <a:avLst/>
+          </a:prstGeom>
+          <a:solidFill xmlns:a="http://schemas.openxmlformats.org/drawingml/2006/main">
+            <a:srgbClr val="D9E0E6"/>
+          </a:solidFill>
+          <a:ln xmlns:a="http://schemas.openxmlformats.org/drawingml/2006/main" w="0">
+            <a:solidFill>
+              <a:srgbClr val="D9E0E6"/>
+            </a:solidFill>
+          </a:ln>
+        </p:spPr>
+      </p:sp>
+      <p:sp>
+        <p:nvSpPr>
+          <p:cNvPr id="24" name="">
+            <a:extLst xmlns:a="http://schemas.openxmlformats.org/drawingml/2006/main">
+              <a:ext uri="{FF2B5EF4-FFF2-40B4-BE49-F238E27FC236}">
+                <a16:creationId xmlns:a16="http://schemas.microsoft.com/office/drawing/2014/main" id="{E4BF3288-2E58-4970-9302-F011672E7E5C}"/>
+              </a:ext>
+            </a:extLst>
+          </p:cNvPr>
+          <p:cNvSpPr>
+            <a:spLocks xmlns:a="http://schemas.openxmlformats.org/drawingml/2006/main" noGrp="1"/>
+          </p:cNvSpPr>
+          <p:nvPr/>
+        </p:nvSpPr>
+        <p:spPr>
+          <a:xfrm xmlns:a="http://schemas.openxmlformats.org/drawingml/2006/main">
+            <a:off x="1162050" y="4524375"/>
+            <a:ext cx="400050" cy="400050"/>
+          </a:xfrm>
+          <a:prstGeom xmlns:a="http://schemas.openxmlformats.org/drawingml/2006/main" prst="rect">
+            <a:avLst/>
+          </a:prstGeom>
+          <a:noFill xmlns:a="http://schemas.openxmlformats.org/drawingml/2006/main"/>
+          <a:ln xmlns:a="http://schemas.openxmlformats.org/drawingml/2006/main" w="0">
+            <a:noFill/>
+          </a:ln>
+        </p:spPr>
+        <p:txBody>
+          <a:bodyPr xmlns:a="http://schemas.openxmlformats.org/drawingml/2006/main" anchor="ctr">
+            <a:normAutofit fontScale="100000"/>
+          </a:bodyPr>
+          <a:lstStyle xmlns:a="http://schemas.openxmlformats.org/drawingml/2006/main"/>
+          <a:p xmlns:a="http://schemas.openxmlformats.org/drawingml/2006/main">
+            <a:pPr algn="ctr">
+              <a:defRPr sz="1125" b="1">
+                <a:solidFill>
+                  <a:srgbClr val="2C6E73"/>
+                </a:solidFill>
+                <a:latin typeface="Arial"/>
+                <a:ea typeface="Arial"/>
+                <a:cs typeface="Arial"/>
+              </a:defRPr>
+            </a:pPr>
+            <a:r>
+              <a:rPr sz="1125" b="1">
+                <a:solidFill>
+                  <a:srgbClr val="2C6E73"/>
+                </a:solidFill>
+                <a:latin typeface="Arial"/>
+                <a:ea typeface="Arial"/>
+                <a:cs typeface="Arial"/>
+              </a:rPr>
+              <a:t>5</a:t>
+            </a:r>
+          </a:p>
+        </p:txBody>
+      </p:sp>
+      <p:sp>
+        <p:nvSpPr>
+          <p:cNvPr id="25" name="">
+            <a:extLst xmlns:a="http://schemas.openxmlformats.org/drawingml/2006/main">
+              <a:ext uri="{FF2B5EF4-FFF2-40B4-BE49-F238E27FC236}">
+                <a16:creationId xmlns:a16="http://schemas.microsoft.com/office/drawing/2014/main" id="{1C61A0EC-A155-4825-B079-0A6C91FEAE8B}"/>
+              </a:ext>
+            </a:extLst>
+          </p:cNvPr>
+          <p:cNvSpPr>
+            <a:spLocks xmlns:a="http://schemas.openxmlformats.org/drawingml/2006/main" noGrp="1"/>
+          </p:cNvSpPr>
+          <p:nvPr/>
+        </p:nvSpPr>
+        <p:spPr>
+          <a:xfrm xmlns:a="http://schemas.openxmlformats.org/drawingml/2006/main">
+            <a:off x="1714500" y="4438650"/>
+            <a:ext cx="9525000" cy="514350"/>
+          </a:xfrm>
+          <a:prstGeom xmlns:a="http://schemas.openxmlformats.org/drawingml/2006/main" prst="rect">
+            <a:avLst/>
+          </a:prstGeom>
+          <a:noFill xmlns:a="http://schemas.openxmlformats.org/drawingml/2006/main"/>
+          <a:ln xmlns:a="http://schemas.openxmlformats.org/drawingml/2006/main" w="0">
+            <a:noFill/>
+          </a:ln>
+        </p:spPr>
+        <p:txBody>
+          <a:bodyPr xmlns:a="http://schemas.openxmlformats.org/drawingml/2006/main" anchor="ctr">
+            <a:normAutofit fontScale="100000"/>
+          </a:bodyPr>
+          <a:lstStyle xmlns:a="http://schemas.openxmlformats.org/drawingml/2006/main"/>
+          <a:p xmlns:a="http://schemas.openxmlformats.org/drawingml/2006/main">
+            <a:pPr algn="l">
+              <a:defRPr sz="1350" b="0">
+                <a:solidFill>
+                  <a:srgbClr val="17253A"/>
+                </a:solidFill>
+                <a:latin typeface="Arial"/>
+                <a:ea typeface="Arial"/>
+                <a:cs typeface="Arial"/>
+              </a:defRPr>
+            </a:pPr>
+            <a:r>
+              <a:rPr sz="1350" b="0">
+                <a:solidFill>
+                  <a:srgbClr val="17253A"/>
+                </a:solidFill>
+                <a:latin typeface="Arial"/>
+                <a:ea typeface="Arial"/>
+                <a:cs typeface="Arial"/>
+              </a:rPr>
+              <a:t>Quotient = 260</a:t>
+            </a:r>
+          </a:p>
+        </p:txBody>
+      </p:sp>
+      <p:sp>
+        <p:nvSpPr>
+          <p:cNvPr id="26" name="">
+            <a:extLst xmlns:a="http://schemas.openxmlformats.org/drawingml/2006/main">
+              <a:ext uri="{FF2B5EF4-FFF2-40B4-BE49-F238E27FC236}">
+                <a16:creationId xmlns:a16="http://schemas.microsoft.com/office/drawing/2014/main" id="{4116367F-7C07-4B0A-AEBB-6DD4839CCDDA}"/>
+              </a:ext>
+            </a:extLst>
+          </p:cNvPr>
+          <p:cNvSpPr>
+            <a:spLocks xmlns:a="http://schemas.openxmlformats.org/drawingml/2006/main" noGrp="1"/>
+          </p:cNvSpPr>
+          <p:nvPr/>
+        </p:nvSpPr>
+        <p:spPr>
+          <a:xfrm xmlns:a="http://schemas.openxmlformats.org/drawingml/2006/main">
+            <a:off x="1714500" y="4972050"/>
+            <a:ext cx="9334500" cy="9525"/>
+          </a:xfrm>
+          <a:prstGeom xmlns:a="http://schemas.openxmlformats.org/drawingml/2006/main" prst="rect">
+            <a:avLst/>
+          </a:prstGeom>
+          <a:solidFill xmlns:a="http://schemas.openxmlformats.org/drawingml/2006/main">
+            <a:srgbClr val="D9E0E6"/>
+          </a:solidFill>
+          <a:ln xmlns:a="http://schemas.openxmlformats.org/drawingml/2006/main" w="0">
+            <a:solidFill>
+              <a:srgbClr val="D9E0E6"/>
+            </a:solidFill>
+          </a:ln>
+        </p:spPr>
+      </p:sp>
+      <p:sp>
+        <p:nvSpPr>
+          <p:cNvPr id="27" name="">
+            <a:extLst xmlns:a="http://schemas.openxmlformats.org/drawingml/2006/main">
+              <a:ext uri="{FF2B5EF4-FFF2-40B4-BE49-F238E27FC236}">
+                <a16:creationId xmlns:a16="http://schemas.microsoft.com/office/drawing/2014/main" id="{91160F0F-4B44-4683-A49D-6F508D780664}"/>
+              </a:ext>
+            </a:extLst>
+          </p:cNvPr>
+          <p:cNvSpPr>
+            <a:spLocks xmlns:a="http://schemas.openxmlformats.org/drawingml/2006/main" noGrp="1"/>
+          </p:cNvSpPr>
+          <p:nvPr/>
+        </p:nvSpPr>
+        <p:spPr>
+          <a:xfrm xmlns:a="http://schemas.openxmlformats.org/drawingml/2006/main">
+            <a:off x="1162050" y="5105400"/>
+            <a:ext cx="400050" cy="400050"/>
+          </a:xfrm>
+          <a:prstGeom xmlns:a="http://schemas.openxmlformats.org/drawingml/2006/main" prst="rect">
+            <a:avLst/>
+          </a:prstGeom>
+          <a:noFill xmlns:a="http://schemas.openxmlformats.org/drawingml/2006/main"/>
+          <a:ln xmlns:a="http://schemas.openxmlformats.org/drawingml/2006/main" w="0">
+            <a:noFill/>
+          </a:ln>
+        </p:spPr>
+        <p:txBody>
+          <a:bodyPr xmlns:a="http://schemas.openxmlformats.org/drawingml/2006/main" anchor="ctr">
+            <a:normAutofit fontScale="100000"/>
+          </a:bodyPr>
+          <a:lstStyle xmlns:a="http://schemas.openxmlformats.org/drawingml/2006/main"/>
+          <a:p xmlns:a="http://schemas.openxmlformats.org/drawingml/2006/main">
+            <a:pPr algn="ctr">
+              <a:defRPr sz="1125" b="1">
                 <a:solidFill>
                   <a:srgbClr val="2F785D"/>
                 </a:solidFill>
                 <a:latin typeface="Arial"/>
                 <a:ea typeface="Arial"/>
                 <a:cs typeface="Arial"/>
+              </a:defRPr>
+            </a:pPr>
+            <a:r>
+              <a:rPr sz="1125" b="1">
+                <a:solidFill>
+                  <a:srgbClr val="2F785D"/>
+                </a:solidFill>
+                <a:latin typeface="Arial"/>
+                <a:ea typeface="Arial"/>
+                <a:cs typeface="Arial"/>
               </a:rPr>
-              <a:t>Check the result: Multiply the quotient by the divisor to check the result.</a:t>
+              <a:t>6</a:t>
+            </a:r>
+          </a:p>
+        </p:txBody>
+      </p:sp>
+      <p:sp>
+        <p:nvSpPr>
+          <p:cNvPr id="28" name="">
+            <a:extLst xmlns:a="http://schemas.openxmlformats.org/drawingml/2006/main">
+              <a:ext uri="{FF2B5EF4-FFF2-40B4-BE49-F238E27FC236}">
+                <a16:creationId xmlns:a16="http://schemas.microsoft.com/office/drawing/2014/main" id="{90269C61-A679-4717-97D7-ABBD74F6BD1F}"/>
+              </a:ext>
+            </a:extLst>
+          </p:cNvPr>
+          <p:cNvSpPr>
+            <a:spLocks xmlns:a="http://schemas.openxmlformats.org/drawingml/2006/main" noGrp="1"/>
+          </p:cNvSpPr>
+          <p:nvPr/>
+        </p:nvSpPr>
+        <p:spPr>
+          <a:xfrm xmlns:a="http://schemas.openxmlformats.org/drawingml/2006/main">
+            <a:off x="1714500" y="5019675"/>
+            <a:ext cx="9525000" cy="514350"/>
+          </a:xfrm>
+          <a:prstGeom xmlns:a="http://schemas.openxmlformats.org/drawingml/2006/main" prst="rect">
+            <a:avLst/>
+          </a:prstGeom>
+          <a:noFill xmlns:a="http://schemas.openxmlformats.org/drawingml/2006/main"/>
+          <a:ln xmlns:a="http://schemas.openxmlformats.org/drawingml/2006/main" w="0">
+            <a:noFill/>
+          </a:ln>
+        </p:spPr>
+        <p:txBody>
+          <a:bodyPr xmlns:a="http://schemas.openxmlformats.org/drawingml/2006/main" anchor="ctr">
+            <a:normAutofit fontScale="100000"/>
+          </a:bodyPr>
+          <a:lstStyle xmlns:a="http://schemas.openxmlformats.org/drawingml/2006/main"/>
+          <a:p xmlns:a="http://schemas.openxmlformats.org/drawingml/2006/main">
+            <a:pPr algn="l">
+              <a:defRPr sz="1350" b="1">
+                <a:solidFill>
+                  <a:srgbClr val="2F785D"/>
+                </a:solidFill>
+                <a:latin typeface="Arial"/>
+                <a:ea typeface="Arial"/>
+                <a:cs typeface="Arial"/>
+              </a:defRPr>
+            </a:pPr>
+            <a:r>
+              <a:rPr sz="1350" b="1">
+                <a:solidFill>
+                  <a:srgbClr val="2F785D"/>
+                </a:solidFill>
+                <a:latin typeface="Arial"/>
+                <a:ea typeface="Arial"/>
+                <a:cs typeface="Arial"/>
+              </a:rPr>
+              <a:t>260 tins per crate</a:t>
             </a:r>
           </a:p>
         </p:txBody>
@@ -8841,7 +9141,7 @@
     </p:spTree>
     <p:extLst>
       <p:ext uri="{BB962C8B-B14F-4D97-AF65-F5344CB8AC3E}">
-        <p14:creationId xmlns:p14="http://schemas.microsoft.com/office/powerpoint/2010/main" val="1933005903"/>
+        <p14:creationId xmlns:p14="http://schemas.microsoft.com/office/powerpoint/2010/main" val="1500057789"/>
       </p:ext>
     </p:extLst>
   </p:cSld>
@@ -9078,6 +9378,96 @@
                       </p:childTnLst>
                     </p:cTn>
                   </p:par>
+                  <p:par>
+                    <p:cTn id="23" fill="hold">
+                      <p:stCondLst>
+                        <p:cond delay="indefinite"/>
+                      </p:stCondLst>
+                      <p:childTnLst>
+                        <p:par>
+                          <p:cTn id="24" fill="hold">
+                            <p:stCondLst>
+                              <p:cond delay="0"/>
+                            </p:stCondLst>
+                            <p:childTnLst>
+                              <p:par>
+                                <p:cTn id="25" presetID="1" presetClass="entr" presetSubtype="0" fill="hold" grpId="0" nodeType="clickEffect">
+                                  <p:stCondLst>
+                                    <p:cond delay="0"/>
+                                  </p:stCondLst>
+                                  <p:childTnLst>
+                                    <p:set>
+                                      <p:cBhvr>
+                                        <p:cTn id="26" dur="1" fill="hold">
+                                          <p:stCondLst>
+                                            <p:cond delay="0"/>
+                                          </p:stCondLst>
+                                        </p:cTn>
+                                        <p:tgtEl>
+                                          <p:spTgt spid="25"/>
+                                        </p:tgtEl>
+                                        <p:attrNameLst>
+                                          <p:attrName>style.visibility</p:attrName>
+                                        </p:attrNameLst>
+                                      </p:cBhvr>
+                                      <p:to>
+                                        <p:strVal val="visible"/>
+                                      </p:to>
+                                    </p:set>
+                                  </p:childTnLst>
+                                </p:cTn>
+                              </p:par>
+                            </p:childTnLst>
+                          </p:cTn>
+                        </p:par>
+                      </p:childTnLst>
+                    </p:cTn>
+                  </p:par>
+                  <p:par>
+                    <p:cTn id="27" fill="hold">
+                      <p:stCondLst>
+                        <p:cond delay="indefinite"/>
+                      </p:stCondLst>
+                      <p:childTnLst>
+                        <p:par>
+                          <p:cTn id="28" fill="hold">
+                            <p:stCondLst>
+                              <p:cond delay="0"/>
+                            </p:stCondLst>
+                            <p:childTnLst>
+                              <p:par>
+                                <p:cTn id="29" presetID="1" presetClass="entr" presetSubtype="0" fill="hold" grpId="0" nodeType="clickEffect">
+                                  <p:stCondLst>
+                                    <p:cond delay="0"/>
+                                  </p:stCondLst>
+                                  <p:childTnLst>
+                                    <p:set>
+                                      <p:cBhvr>
+                                        <p:cTn id="30" dur="1" fill="hold">
+                                          <p:stCondLst>
+                                            <p:cond delay="0"/>
+                                          </p:stCondLst>
+                                        </p:cTn>
+                                        <p:tgtEl>
+                                          <p:spTgt spid="28"/>
+                                        </p:tgtEl>
+                                        <p:attrNameLst>
+                                          <p:attrName>style.visibility</p:attrName>
+                                        </p:attrNameLst>
+                                      </p:cBhvr>
+                                      <p:to>
+                                        <p:strVal val="visible"/>
+                                      </p:to>
+                                    </p:set>
+                                  </p:childTnLst>
+                                </p:cTn>
+                              </p:par>
+                            </p:childTnLst>
+                          </p:cTn>
+                        </p:par>
+                      </p:childTnLst>
+                    </p:cTn>
+                  </p:par>
                 </p:childTnLst>
               </p:cTn>
               <p:prevCondLst>
@@ -9105,6 +9495,8 @@
       <p:bldP spid="16" grpId="0"/>
       <p:bldP spid="19" grpId="0"/>
       <p:bldP spid="22" grpId="0"/>
+      <p:bldP spid="25" grpId="0"/>
+      <p:bldP spid="28" grpId="0"/>
     </p:bldLst>
   </p:timing>
 </p:sld>
@@ -9134,7 +9526,7 @@
           <p:cNvPr id="15" name="">
             <a:extLst xmlns:a="http://schemas.openxmlformats.org/drawingml/2006/main">
               <a:ext uri="{FF2B5EF4-FFF2-40B4-BE49-F238E27FC236}">
-                <a16:creationId xmlns:a16="http://schemas.microsoft.com/office/drawing/2014/main" id="{F668D188-B31E-4EAD-95C2-B1E64DA60816}"/>
+                <a16:creationId xmlns:a16="http://schemas.microsoft.com/office/drawing/2014/main" id="{5D789F62-199F-4388-A9C9-8518456555E1}"/>
               </a:ext>
             </a:extLst>
           </p:cNvPr>
@@ -9166,7 +9558,7 @@
           <p:cNvPr id="2" name="">
             <a:extLst xmlns:a="http://schemas.openxmlformats.org/drawingml/2006/main">
               <a:ext uri="{FF2B5EF4-FFF2-40B4-BE49-F238E27FC236}">
-                <a16:creationId xmlns:a16="http://schemas.microsoft.com/office/drawing/2014/main" id="{C4F15DC9-5A0B-411C-9576-B9362E1A6E23}"/>
+                <a16:creationId xmlns:a16="http://schemas.microsoft.com/office/drawing/2014/main" id="{32163CA4-D273-469E-B8DD-9067CD83C092}"/>
               </a:ext>
             </a:extLst>
           </p:cNvPr>
@@ -9223,7 +9615,7 @@
           <p:cNvPr id="3" name="">
             <a:extLst xmlns:a="http://schemas.openxmlformats.org/drawingml/2006/main">
               <a:ext uri="{FF2B5EF4-FFF2-40B4-BE49-F238E27FC236}">
-                <a16:creationId xmlns:a16="http://schemas.microsoft.com/office/drawing/2014/main" id="{0BAD77DB-6F46-4C4D-8A43-60D5E6483C35}"/>
+                <a16:creationId xmlns:a16="http://schemas.microsoft.com/office/drawing/2014/main" id="{62979444-4ABF-42FB-9038-635631CD6769}"/>
               </a:ext>
             </a:extLst>
           </p:cNvPr>
@@ -9255,7 +9647,7 @@
           <p:cNvPr id="4" name="">
             <a:extLst xmlns:a="http://schemas.openxmlformats.org/drawingml/2006/main">
               <a:ext uri="{FF2B5EF4-FFF2-40B4-BE49-F238E27FC236}">
-                <a16:creationId xmlns:a16="http://schemas.microsoft.com/office/drawing/2014/main" id="{8602CF6E-1216-4E60-9383-C78EE35A76F8}"/>
+                <a16:creationId xmlns:a16="http://schemas.microsoft.com/office/drawing/2014/main" id="{87F80830-8B2D-455D-A69F-F91358424046}"/>
               </a:ext>
             </a:extLst>
           </p:cNvPr>
@@ -9312,7 +9704,7 @@
           <p:cNvPr id="5" name="">
             <a:extLst xmlns:a="http://schemas.openxmlformats.org/drawingml/2006/main">
               <a:ext uri="{FF2B5EF4-FFF2-40B4-BE49-F238E27FC236}">
-                <a16:creationId xmlns:a16="http://schemas.microsoft.com/office/drawing/2014/main" id="{340060EB-42BD-4088-AEE3-0C5CC28B8800}"/>
+                <a16:creationId xmlns:a16="http://schemas.microsoft.com/office/drawing/2014/main" id="{D0D6EC43-960C-4947-8506-A1C3A6835606}"/>
               </a:ext>
             </a:extLst>
           </p:cNvPr>
@@ -9369,7 +9761,7 @@
           <p:cNvPr id="6" name="">
             <a:extLst xmlns:a="http://schemas.openxmlformats.org/drawingml/2006/main">
               <a:ext uri="{FF2B5EF4-FFF2-40B4-BE49-F238E27FC236}">
-                <a16:creationId xmlns:a16="http://schemas.microsoft.com/office/drawing/2014/main" id="{8407D12D-65DF-423B-BB48-418422960769}"/>
+                <a16:creationId xmlns:a16="http://schemas.microsoft.com/office/drawing/2014/main" id="{61C688DA-DAE6-4601-8717-3681DD5FFB30}"/>
               </a:ext>
             </a:extLst>
           </p:cNvPr>
@@ -9426,7 +9818,7 @@
           <p:cNvPr id="7" name="">
             <a:extLst xmlns:a="http://schemas.openxmlformats.org/drawingml/2006/main">
               <a:ext uri="{FF2B5EF4-FFF2-40B4-BE49-F238E27FC236}">
-                <a16:creationId xmlns:a16="http://schemas.microsoft.com/office/drawing/2014/main" id="{3A958370-AF1D-42A7-B890-E62D22A635B2}"/>
+                <a16:creationId xmlns:a16="http://schemas.microsoft.com/office/drawing/2014/main" id="{421AB0F8-53A5-4300-BEBB-A6AF0155AC35}"/>
               </a:ext>
             </a:extLst>
           </p:cNvPr>
@@ -9458,7 +9850,7 @@
           <p:cNvPr id="8" name="">
             <a:extLst xmlns:a="http://schemas.openxmlformats.org/drawingml/2006/main">
               <a:ext uri="{FF2B5EF4-FFF2-40B4-BE49-F238E27FC236}">
-                <a16:creationId xmlns:a16="http://schemas.microsoft.com/office/drawing/2014/main" id="{B0E175FC-54DC-40B3-9A92-A658FEF9D1C9}"/>
+                <a16:creationId xmlns:a16="http://schemas.microsoft.com/office/drawing/2014/main" id="{E2E21994-4567-43B6-BA63-CD526F22B75E}"/>
               </a:ext>
             </a:extLst>
           </p:cNvPr>
@@ -9515,7 +9907,7 @@
           <p:cNvPr id="9" name="">
             <a:extLst xmlns:a="http://schemas.openxmlformats.org/drawingml/2006/main">
               <a:ext uri="{FF2B5EF4-FFF2-40B4-BE49-F238E27FC236}">
-                <a16:creationId xmlns:a16="http://schemas.microsoft.com/office/drawing/2014/main" id="{A207925C-BC3E-436F-B4E4-1E4436EB4BBD}"/>
+                <a16:creationId xmlns:a16="http://schemas.microsoft.com/office/drawing/2014/main" id="{6A53B728-EC45-4369-A86A-B42551D4F9BB}"/>
               </a:ext>
             </a:extLst>
           </p:cNvPr>
@@ -9572,7 +9964,7 @@
           <p:cNvPr id="10" name="">
             <a:extLst xmlns:a="http://schemas.openxmlformats.org/drawingml/2006/main">
               <a:ext uri="{FF2B5EF4-FFF2-40B4-BE49-F238E27FC236}">
-                <a16:creationId xmlns:a16="http://schemas.microsoft.com/office/drawing/2014/main" id="{10A51CBD-84F3-43BF-9850-D577A292B00C}"/>
+                <a16:creationId xmlns:a16="http://schemas.microsoft.com/office/drawing/2014/main" id="{D6B75A21-91A7-4705-9789-1482EAAEEEFF}"/>
               </a:ext>
             </a:extLst>
           </p:cNvPr>
@@ -9629,7 +10021,7 @@
           <p:cNvPr id="11" name="">
             <a:extLst xmlns:a="http://schemas.openxmlformats.org/drawingml/2006/main">
               <a:ext uri="{FF2B5EF4-FFF2-40B4-BE49-F238E27FC236}">
-                <a16:creationId xmlns:a16="http://schemas.microsoft.com/office/drawing/2014/main" id="{2B763DD0-F190-4285-A7CC-B517DB6010D9}"/>
+                <a16:creationId xmlns:a16="http://schemas.microsoft.com/office/drawing/2014/main" id="{497DBC88-86A6-46A8-A353-B74747AA57F2}"/>
               </a:ext>
             </a:extLst>
           </p:cNvPr>
@@ -9686,7 +10078,7 @@
           <p:cNvPr id="12" name="">
             <a:extLst xmlns:a="http://schemas.openxmlformats.org/drawingml/2006/main">
               <a:ext uri="{FF2B5EF4-FFF2-40B4-BE49-F238E27FC236}">
-                <a16:creationId xmlns:a16="http://schemas.microsoft.com/office/drawing/2014/main" id="{F314DA32-71F0-4316-BC33-4A50A99E55FA}"/>
+                <a16:creationId xmlns:a16="http://schemas.microsoft.com/office/drawing/2014/main" id="{A0EACE88-4332-4F6C-AE22-64D85929093E}"/>
               </a:ext>
             </a:extLst>
           </p:cNvPr>
@@ -9718,7 +10110,7 @@
           <p:cNvPr id="13" name="">
             <a:extLst xmlns:a="http://schemas.openxmlformats.org/drawingml/2006/main">
               <a:ext uri="{FF2B5EF4-FFF2-40B4-BE49-F238E27FC236}">
-                <a16:creationId xmlns:a16="http://schemas.microsoft.com/office/drawing/2014/main" id="{366D0819-204C-4053-9013-0A460268A840}"/>
+                <a16:creationId xmlns:a16="http://schemas.microsoft.com/office/drawing/2014/main" id="{6BB11209-0D09-4227-9C89-FDB002291B0A}"/>
               </a:ext>
             </a:extLst>
           </p:cNvPr>
@@ -9775,7 +10167,7 @@
           <p:cNvPr id="14" name="">
             <a:extLst xmlns:a="http://schemas.openxmlformats.org/drawingml/2006/main">
               <a:ext uri="{FF2B5EF4-FFF2-40B4-BE49-F238E27FC236}">
-                <a16:creationId xmlns:a16="http://schemas.microsoft.com/office/drawing/2014/main" id="{915E72BF-D0F9-4288-A2CC-30C35BA67F04}"/>
+                <a16:creationId xmlns:a16="http://schemas.microsoft.com/office/drawing/2014/main" id="{4784408B-429A-4E3A-A3A3-151409012DC7}"/>
               </a:ext>
             </a:extLst>
           </p:cNvPr>
@@ -9830,7 +10222,7 @@
     </p:spTree>
     <p:extLst>
       <p:ext uri="{BB962C8B-B14F-4D97-AF65-F5344CB8AC3E}">
-        <p14:creationId xmlns:p14="http://schemas.microsoft.com/office/powerpoint/2010/main" val="1569438918"/>
+        <p14:creationId xmlns:p14="http://schemas.microsoft.com/office/powerpoint/2010/main" val="786855335"/>
       </p:ext>
     </p:extLst>
   </p:cSld>
@@ -10031,7 +10423,7 @@
           <p:cNvPr id="16" name="">
             <a:extLst xmlns:a="http://schemas.openxmlformats.org/drawingml/2006/main">
               <a:ext uri="{FF2B5EF4-FFF2-40B4-BE49-F238E27FC236}">
-                <a16:creationId xmlns:a16="http://schemas.microsoft.com/office/drawing/2014/main" id="{8E74D994-528A-4C89-B1E8-DC3F70B0389A}"/>
+                <a16:creationId xmlns:a16="http://schemas.microsoft.com/office/drawing/2014/main" id="{D4564660-5F42-4C94-85EB-3BFBA387FB02}"/>
               </a:ext>
             </a:extLst>
           </p:cNvPr>
@@ -10063,7 +10455,7 @@
           <p:cNvPr id="2" name="">
             <a:extLst xmlns:a="http://schemas.openxmlformats.org/drawingml/2006/main">
               <a:ext uri="{FF2B5EF4-FFF2-40B4-BE49-F238E27FC236}">
-                <a16:creationId xmlns:a16="http://schemas.microsoft.com/office/drawing/2014/main" id="{D26594F7-0864-4D94-AAFA-FBCB47E1FD10}"/>
+                <a16:creationId xmlns:a16="http://schemas.microsoft.com/office/drawing/2014/main" id="{1B9C69A0-2704-484B-ADEB-82DDE19C218E}"/>
               </a:ext>
             </a:extLst>
           </p:cNvPr>
@@ -10120,7 +10512,7 @@
           <p:cNvPr id="3" name="">
             <a:extLst xmlns:a="http://schemas.openxmlformats.org/drawingml/2006/main">
               <a:ext uri="{FF2B5EF4-FFF2-40B4-BE49-F238E27FC236}">
-                <a16:creationId xmlns:a16="http://schemas.microsoft.com/office/drawing/2014/main" id="{30689A80-EF97-47AB-A998-F989DD72DAA8}"/>
+                <a16:creationId xmlns:a16="http://schemas.microsoft.com/office/drawing/2014/main" id="{AE55C088-1510-42C9-BC95-55C4B4C9013E}"/>
               </a:ext>
             </a:extLst>
           </p:cNvPr>
@@ -10152,7 +10544,7 @@
           <p:cNvPr id="4" name="">
             <a:extLst xmlns:a="http://schemas.openxmlformats.org/drawingml/2006/main">
               <a:ext uri="{FF2B5EF4-FFF2-40B4-BE49-F238E27FC236}">
-                <a16:creationId xmlns:a16="http://schemas.microsoft.com/office/drawing/2014/main" id="{83F86131-7191-41A0-96F1-03143B78FB0E}"/>
+                <a16:creationId xmlns:a16="http://schemas.microsoft.com/office/drawing/2014/main" id="{36185853-9327-4E16-B383-87A760CC5C5E}"/>
               </a:ext>
             </a:extLst>
           </p:cNvPr>
@@ -10209,7 +10601,7 @@
           <p:cNvPr id="5" name="">
             <a:extLst xmlns:a="http://schemas.openxmlformats.org/drawingml/2006/main">
               <a:ext uri="{FF2B5EF4-FFF2-40B4-BE49-F238E27FC236}">
-                <a16:creationId xmlns:a16="http://schemas.microsoft.com/office/drawing/2014/main" id="{FE9FE424-E2D6-4A61-9C10-9E64CC9AE415}"/>
+                <a16:creationId xmlns:a16="http://schemas.microsoft.com/office/drawing/2014/main" id="{67F0CBDF-2553-4B54-9FEE-4E975A10D34C}"/>
               </a:ext>
             </a:extLst>
           </p:cNvPr>
@@ -10266,7 +10658,7 @@
           <p:cNvPr id="6" name="">
             <a:extLst xmlns:a="http://schemas.openxmlformats.org/drawingml/2006/main">
               <a:ext uri="{FF2B5EF4-FFF2-40B4-BE49-F238E27FC236}">
-                <a16:creationId xmlns:a16="http://schemas.microsoft.com/office/drawing/2014/main" id="{D1B0B7BA-186C-4EDC-A5DA-B4BB6B644002}"/>
+                <a16:creationId xmlns:a16="http://schemas.microsoft.com/office/drawing/2014/main" id="{D1183385-5E04-4DF3-9E2E-39DB46861971}"/>
               </a:ext>
             </a:extLst>
           </p:cNvPr>
@@ -10323,7 +10715,7 @@
           <p:cNvPr id="7" name="">
             <a:extLst xmlns:a="http://schemas.openxmlformats.org/drawingml/2006/main">
               <a:ext uri="{FF2B5EF4-FFF2-40B4-BE49-F238E27FC236}">
-                <a16:creationId xmlns:a16="http://schemas.microsoft.com/office/drawing/2014/main" id="{6C2D982F-7E08-45A8-B7C3-B939D447E686}"/>
+                <a16:creationId xmlns:a16="http://schemas.microsoft.com/office/drawing/2014/main" id="{C8D94F00-0DBE-4357-92B8-BD1C23C5E893}"/>
               </a:ext>
             </a:extLst>
           </p:cNvPr>
@@ -10355,7 +10747,7 @@
           <p:cNvPr id="8" name="">
             <a:extLst xmlns:a="http://schemas.openxmlformats.org/drawingml/2006/main">
               <a:ext uri="{FF2B5EF4-FFF2-40B4-BE49-F238E27FC236}">
-                <a16:creationId xmlns:a16="http://schemas.microsoft.com/office/drawing/2014/main" id="{C6A8E83B-E432-4C8D-9582-4B9F5CE8383A}"/>
+                <a16:creationId xmlns:a16="http://schemas.microsoft.com/office/drawing/2014/main" id="{6F2F9F6F-BA24-4536-A368-3313874D6D8D}"/>
               </a:ext>
             </a:extLst>
           </p:cNvPr>
@@ -10412,7 +10804,7 @@
           <p:cNvPr id="9" name="">
             <a:extLst xmlns:a="http://schemas.openxmlformats.org/drawingml/2006/main">
               <a:ext uri="{FF2B5EF4-FFF2-40B4-BE49-F238E27FC236}">
-                <a16:creationId xmlns:a16="http://schemas.microsoft.com/office/drawing/2014/main" id="{476F6DC1-B8C0-4E33-9A99-C0D91A201E80}"/>
+                <a16:creationId xmlns:a16="http://schemas.microsoft.com/office/drawing/2014/main" id="{9355CD84-3182-4D2D-8C20-790E2A2D8B95}"/>
               </a:ext>
             </a:extLst>
           </p:cNvPr>
@@ -10469,7 +10861,7 @@
           <p:cNvPr id="10" name="">
             <a:extLst xmlns:a="http://schemas.openxmlformats.org/drawingml/2006/main">
               <a:ext uri="{FF2B5EF4-FFF2-40B4-BE49-F238E27FC236}">
-                <a16:creationId xmlns:a16="http://schemas.microsoft.com/office/drawing/2014/main" id="{B4957327-2E25-42F7-B775-0EC48036FA78}"/>
+                <a16:creationId xmlns:a16="http://schemas.microsoft.com/office/drawing/2014/main" id="{53889950-49B1-462D-B7EA-7D33D8A501AE}"/>
               </a:ext>
             </a:extLst>
           </p:cNvPr>
@@ -10526,7 +10918,7 @@
           <p:cNvPr id="11" name="">
             <a:extLst xmlns:a="http://schemas.openxmlformats.org/drawingml/2006/main">
               <a:ext uri="{FF2B5EF4-FFF2-40B4-BE49-F238E27FC236}">
-                <a16:creationId xmlns:a16="http://schemas.microsoft.com/office/drawing/2014/main" id="{9CAB8D0C-18A0-45B6-B4E1-625C7B6D2567}"/>
+                <a16:creationId xmlns:a16="http://schemas.microsoft.com/office/drawing/2014/main" id="{C6EF98CF-CBDF-4811-B7C6-05BDE4C0A296}"/>
               </a:ext>
             </a:extLst>
           </p:cNvPr>
@@ -10583,7 +10975,7 @@
           <p:cNvPr id="12" name="">
             <a:extLst xmlns:a="http://schemas.openxmlformats.org/drawingml/2006/main">
               <a:ext uri="{FF2B5EF4-FFF2-40B4-BE49-F238E27FC236}">
-                <a16:creationId xmlns:a16="http://schemas.microsoft.com/office/drawing/2014/main" id="{32B3ACD8-23F5-4341-A6F7-E554A35E146E}"/>
+                <a16:creationId xmlns:a16="http://schemas.microsoft.com/office/drawing/2014/main" id="{2F5CA037-D082-4A2A-9249-97D84269DACA}"/>
               </a:ext>
             </a:extLst>
           </p:cNvPr>
@@ -10640,7 +11032,7 @@
           <p:cNvPr id="13" name="">
             <a:extLst xmlns:a="http://schemas.openxmlformats.org/drawingml/2006/main">
               <a:ext uri="{FF2B5EF4-FFF2-40B4-BE49-F238E27FC236}">
-                <a16:creationId xmlns:a16="http://schemas.microsoft.com/office/drawing/2014/main" id="{B97A81BE-D1F7-4A8C-BAB3-2A295F46D990}"/>
+                <a16:creationId xmlns:a16="http://schemas.microsoft.com/office/drawing/2014/main" id="{41BE4F6C-DA18-422D-BFC8-3B014DC580DE}"/>
               </a:ext>
             </a:extLst>
           </p:cNvPr>
@@ -10697,7 +11089,7 @@
           <p:cNvPr id="14" name="">
             <a:extLst xmlns:a="http://schemas.openxmlformats.org/drawingml/2006/main">
               <a:ext uri="{FF2B5EF4-FFF2-40B4-BE49-F238E27FC236}">
-                <a16:creationId xmlns:a16="http://schemas.microsoft.com/office/drawing/2014/main" id="{A9765402-7BE2-44F7-A29F-4B411023A11F}"/>
+                <a16:creationId xmlns:a16="http://schemas.microsoft.com/office/drawing/2014/main" id="{4517EEDA-539A-4A08-85C2-0632584F8E7F}"/>
               </a:ext>
             </a:extLst>
           </p:cNvPr>
@@ -10754,7 +11146,7 @@
           <p:cNvPr id="15" name="">
             <a:extLst xmlns:a="http://schemas.openxmlformats.org/drawingml/2006/main">
               <a:ext uri="{FF2B5EF4-FFF2-40B4-BE49-F238E27FC236}">
-                <a16:creationId xmlns:a16="http://schemas.microsoft.com/office/drawing/2014/main" id="{F6113390-32A8-470C-835F-5961FDFA39AE}"/>
+                <a16:creationId xmlns:a16="http://schemas.microsoft.com/office/drawing/2014/main" id="{ABB646DF-078D-4131-81F9-3259A651B7D4}"/>
               </a:ext>
             </a:extLst>
           </p:cNvPr>
@@ -10809,7 +11201,7 @@
     </p:spTree>
     <p:extLst>
       <p:ext uri="{BB962C8B-B14F-4D97-AF65-F5344CB8AC3E}">
-        <p14:creationId xmlns:p14="http://schemas.microsoft.com/office/powerpoint/2010/main" val="1008433188"/>
+        <p14:creationId xmlns:p14="http://schemas.microsoft.com/office/powerpoint/2010/main" val="1594555472"/>
       </p:ext>
     </p:extLst>
   </p:cSld>
@@ -10964,7 +11356,7 @@
           <p:cNvPr id="16" name="">
             <a:extLst xmlns:a="http://schemas.openxmlformats.org/drawingml/2006/main">
               <a:ext uri="{FF2B5EF4-FFF2-40B4-BE49-F238E27FC236}">
-                <a16:creationId xmlns:a16="http://schemas.microsoft.com/office/drawing/2014/main" id="{3631B293-5C47-4B35-8ABA-B3489ABBA0D4}"/>
+                <a16:creationId xmlns:a16="http://schemas.microsoft.com/office/drawing/2014/main" id="{3178EC39-B56C-4409-AE8D-EB02FABC99C3}"/>
               </a:ext>
             </a:extLst>
           </p:cNvPr>
@@ -10996,7 +11388,7 @@
           <p:cNvPr id="2" name="">
             <a:extLst xmlns:a="http://schemas.openxmlformats.org/drawingml/2006/main">
               <a:ext uri="{FF2B5EF4-FFF2-40B4-BE49-F238E27FC236}">
-                <a16:creationId xmlns:a16="http://schemas.microsoft.com/office/drawing/2014/main" id="{CB8D52F2-886F-4B50-BFD1-B31873D0AFE0}"/>
+                <a16:creationId xmlns:a16="http://schemas.microsoft.com/office/drawing/2014/main" id="{B245DBC7-430A-4368-BC86-589D8DC4F474}"/>
               </a:ext>
             </a:extLst>
           </p:cNvPr>
@@ -11053,7 +11445,7 @@
           <p:cNvPr id="3" name="">
             <a:extLst xmlns:a="http://schemas.openxmlformats.org/drawingml/2006/main">
               <a:ext uri="{FF2B5EF4-FFF2-40B4-BE49-F238E27FC236}">
-                <a16:creationId xmlns:a16="http://schemas.microsoft.com/office/drawing/2014/main" id="{8AE79227-D54A-4AED-94A7-8019E85A9CCA}"/>
+                <a16:creationId xmlns:a16="http://schemas.microsoft.com/office/drawing/2014/main" id="{32908D1E-2455-4549-A818-BD14D81C3F15}"/>
               </a:ext>
             </a:extLst>
           </p:cNvPr>
@@ -11085,7 +11477,7 @@
           <p:cNvPr id="4" name="">
             <a:extLst xmlns:a="http://schemas.openxmlformats.org/drawingml/2006/main">
               <a:ext uri="{FF2B5EF4-FFF2-40B4-BE49-F238E27FC236}">
-                <a16:creationId xmlns:a16="http://schemas.microsoft.com/office/drawing/2014/main" id="{585E700D-31BB-4247-80C4-0249369B4772}"/>
+                <a16:creationId xmlns:a16="http://schemas.microsoft.com/office/drawing/2014/main" id="{D0E8EB1B-68D2-458A-8D53-5E0D9AE10B60}"/>
               </a:ext>
             </a:extLst>
           </p:cNvPr>
@@ -11142,7 +11534,7 @@
           <p:cNvPr id="5" name="">
             <a:extLst xmlns:a="http://schemas.openxmlformats.org/drawingml/2006/main">
               <a:ext uri="{FF2B5EF4-FFF2-40B4-BE49-F238E27FC236}">
-                <a16:creationId xmlns:a16="http://schemas.microsoft.com/office/drawing/2014/main" id="{B983542D-F541-4825-A232-97A80A278AC5}"/>
+                <a16:creationId xmlns:a16="http://schemas.microsoft.com/office/drawing/2014/main" id="{E44C4439-2EFF-44EC-99E0-F00B2EDA7EC1}"/>
               </a:ext>
             </a:extLst>
           </p:cNvPr>
@@ -11199,7 +11591,7 @@
           <p:cNvPr id="6" name="">
             <a:extLst xmlns:a="http://schemas.openxmlformats.org/drawingml/2006/main">
               <a:ext uri="{FF2B5EF4-FFF2-40B4-BE49-F238E27FC236}">
-                <a16:creationId xmlns:a16="http://schemas.microsoft.com/office/drawing/2014/main" id="{2E45DCE1-4F0E-42C2-9D55-380737688091}"/>
+                <a16:creationId xmlns:a16="http://schemas.microsoft.com/office/drawing/2014/main" id="{5489DD4A-4252-43B9-94AB-BC5D444BEB3A}"/>
               </a:ext>
             </a:extLst>
           </p:cNvPr>
@@ -11256,7 +11648,7 @@
           <p:cNvPr id="7" name="">
             <a:extLst xmlns:a="http://schemas.openxmlformats.org/drawingml/2006/main">
               <a:ext uri="{FF2B5EF4-FFF2-40B4-BE49-F238E27FC236}">
-                <a16:creationId xmlns:a16="http://schemas.microsoft.com/office/drawing/2014/main" id="{9E49B165-1115-4DA3-BD0E-331654B744A1}"/>
+                <a16:creationId xmlns:a16="http://schemas.microsoft.com/office/drawing/2014/main" id="{09C19858-A987-4F4E-9029-9823028C59CD}"/>
               </a:ext>
             </a:extLst>
           </p:cNvPr>
@@ -11288,7 +11680,7 @@
           <p:cNvPr id="8" name="">
             <a:extLst xmlns:a="http://schemas.openxmlformats.org/drawingml/2006/main">
               <a:ext uri="{FF2B5EF4-FFF2-40B4-BE49-F238E27FC236}">
-                <a16:creationId xmlns:a16="http://schemas.microsoft.com/office/drawing/2014/main" id="{FE42083F-3AC5-4A88-9E95-A1E9B9137233}"/>
+                <a16:creationId xmlns:a16="http://schemas.microsoft.com/office/drawing/2014/main" id="{092386E9-A29A-43F1-A6E7-E8DED0595D32}"/>
               </a:ext>
             </a:extLst>
           </p:cNvPr>
@@ -11345,7 +11737,7 @@
           <p:cNvPr id="9" name="">
             <a:extLst xmlns:a="http://schemas.openxmlformats.org/drawingml/2006/main">
               <a:ext uri="{FF2B5EF4-FFF2-40B4-BE49-F238E27FC236}">
-                <a16:creationId xmlns:a16="http://schemas.microsoft.com/office/drawing/2014/main" id="{C59DDA14-CB30-4EA8-A0FF-0FDE7F123106}"/>
+                <a16:creationId xmlns:a16="http://schemas.microsoft.com/office/drawing/2014/main" id="{1C9EAE73-FBA3-409A-B9DA-EAF8BF2C28BA}"/>
               </a:ext>
             </a:extLst>
           </p:cNvPr>
@@ -11406,7 +11798,7 @@
           <p:nvPr/>
         </p:nvPicPr>
         <p:blipFill>
-          <a:blip xmlns:r="http://schemas.openxmlformats.org/officeDocument/2006/relationships" xmlns:a="http://schemas.openxmlformats.org/drawingml/2006/main" r:embed="Rcbc22698502447be"/>
+          <a:blip xmlns:r="http://schemas.openxmlformats.org/officeDocument/2006/relationships" xmlns:a="http://schemas.openxmlformats.org/drawingml/2006/main" r:embed="R72a300a536384cfe"/>
           <a:stretch xmlns:a="http://schemas.openxmlformats.org/drawingml/2006/main"/>
         </p:blipFill>
         <p:spPr>
@@ -11424,7 +11816,7 @@
           <p:cNvPr id="11" name="">
             <a:extLst xmlns:a="http://schemas.openxmlformats.org/drawingml/2006/main">
               <a:ext uri="{FF2B5EF4-FFF2-40B4-BE49-F238E27FC236}">
-                <a16:creationId xmlns:a16="http://schemas.microsoft.com/office/drawing/2014/main" id="{B309B58B-35E2-4E65-8CBA-AFA74D0472FB}"/>
+                <a16:creationId xmlns:a16="http://schemas.microsoft.com/office/drawing/2014/main" id="{E59B7041-28F5-49C3-A6B5-C524149A2564}"/>
               </a:ext>
             </a:extLst>
           </p:cNvPr>
@@ -11481,7 +11873,7 @@
           <p:cNvPr id="12" name="">
             <a:extLst xmlns:a="http://schemas.openxmlformats.org/drawingml/2006/main">
               <a:ext uri="{FF2B5EF4-FFF2-40B4-BE49-F238E27FC236}">
-                <a16:creationId xmlns:a16="http://schemas.microsoft.com/office/drawing/2014/main" id="{FF522AC2-474C-444A-BA93-A61C74B248E4}"/>
+                <a16:creationId xmlns:a16="http://schemas.microsoft.com/office/drawing/2014/main" id="{AD30670D-A6A6-4AF7-9570-AE21DB299C70}"/>
               </a:ext>
             </a:extLst>
           </p:cNvPr>
@@ -11538,7 +11930,7 @@
           <p:cNvPr id="13" name="">
             <a:extLst xmlns:a="http://schemas.openxmlformats.org/drawingml/2006/main">
               <a:ext uri="{FF2B5EF4-FFF2-40B4-BE49-F238E27FC236}">
-                <a16:creationId xmlns:a16="http://schemas.microsoft.com/office/drawing/2014/main" id="{8D6391BA-0DC1-475D-9BBA-335460185760}"/>
+                <a16:creationId xmlns:a16="http://schemas.microsoft.com/office/drawing/2014/main" id="{09110B07-8C3C-4BA7-B3DB-EE06B29BDC65}"/>
               </a:ext>
             </a:extLst>
           </p:cNvPr>
@@ -11570,7 +11962,7 @@
           <p:cNvPr id="14" name="">
             <a:extLst xmlns:a="http://schemas.openxmlformats.org/drawingml/2006/main">
               <a:ext uri="{FF2B5EF4-FFF2-40B4-BE49-F238E27FC236}">
-                <a16:creationId xmlns:a16="http://schemas.microsoft.com/office/drawing/2014/main" id="{40C4B293-C8B0-40D2-8034-041EB37F4F89}"/>
+                <a16:creationId xmlns:a16="http://schemas.microsoft.com/office/drawing/2014/main" id="{E0F6A533-3454-44F1-AFB6-0E1C6F8E29E3}"/>
               </a:ext>
             </a:extLst>
           </p:cNvPr>
@@ -11627,7 +12019,7 @@
           <p:cNvPr id="15" name="">
             <a:extLst xmlns:a="http://schemas.openxmlformats.org/drawingml/2006/main">
               <a:ext uri="{FF2B5EF4-FFF2-40B4-BE49-F238E27FC236}">
-                <a16:creationId xmlns:a16="http://schemas.microsoft.com/office/drawing/2014/main" id="{7EDF9DA1-5F30-45E6-B8C8-7C8D22EB2BDB}"/>
+                <a16:creationId xmlns:a16="http://schemas.microsoft.com/office/drawing/2014/main" id="{B88DF6AC-DEBC-457D-A773-4CC766F6F495}"/>
               </a:ext>
             </a:extLst>
           </p:cNvPr>
@@ -11682,7 +12074,7 @@
     </p:spTree>
     <p:extLst>
       <p:ext uri="{BB962C8B-B14F-4D97-AF65-F5344CB8AC3E}">
-        <p14:creationId xmlns:p14="http://schemas.microsoft.com/office/powerpoint/2010/main" val="1347784546"/>
+        <p14:creationId xmlns:p14="http://schemas.microsoft.com/office/powerpoint/2010/main" val="2056503574"/>
       </p:ext>
     </p:extLst>
   </p:cSld>
@@ -11837,7 +12229,7 @@
           <p:cNvPr id="23" name="">
             <a:extLst xmlns:a="http://schemas.openxmlformats.org/drawingml/2006/main">
               <a:ext uri="{FF2B5EF4-FFF2-40B4-BE49-F238E27FC236}">
-                <a16:creationId xmlns:a16="http://schemas.microsoft.com/office/drawing/2014/main" id="{381147AC-48B2-4539-836A-3A2AE25C24A7}"/>
+                <a16:creationId xmlns:a16="http://schemas.microsoft.com/office/drawing/2014/main" id="{B0B1A89C-F518-47F6-93D0-3ACA1066759A}"/>
               </a:ext>
             </a:extLst>
           </p:cNvPr>
@@ -11869,7 +12261,7 @@
           <p:cNvPr id="2" name="">
             <a:extLst xmlns:a="http://schemas.openxmlformats.org/drawingml/2006/main">
               <a:ext uri="{FF2B5EF4-FFF2-40B4-BE49-F238E27FC236}">
-                <a16:creationId xmlns:a16="http://schemas.microsoft.com/office/drawing/2014/main" id="{09D83F4F-51F9-4905-A2D5-C43AAE33A51E}"/>
+                <a16:creationId xmlns:a16="http://schemas.microsoft.com/office/drawing/2014/main" id="{388E7455-8B3E-447B-90FF-1B5DEAA61EA4}"/>
               </a:ext>
             </a:extLst>
           </p:cNvPr>
@@ -11926,7 +12318,7 @@
           <p:cNvPr id="3" name="">
             <a:extLst xmlns:a="http://schemas.openxmlformats.org/drawingml/2006/main">
               <a:ext uri="{FF2B5EF4-FFF2-40B4-BE49-F238E27FC236}">
-                <a16:creationId xmlns:a16="http://schemas.microsoft.com/office/drawing/2014/main" id="{82767177-6844-47B7-B28B-BC0A714A82AC}"/>
+                <a16:creationId xmlns:a16="http://schemas.microsoft.com/office/drawing/2014/main" id="{1F753349-9410-463B-B5A7-D5FF55A1ACA4}"/>
               </a:ext>
             </a:extLst>
           </p:cNvPr>
@@ -11958,7 +12350,7 @@
           <p:cNvPr id="4" name="">
             <a:extLst xmlns:a="http://schemas.openxmlformats.org/drawingml/2006/main">
               <a:ext uri="{FF2B5EF4-FFF2-40B4-BE49-F238E27FC236}">
-                <a16:creationId xmlns:a16="http://schemas.microsoft.com/office/drawing/2014/main" id="{948740AC-C1ED-4C57-9295-99AC85D41763}"/>
+                <a16:creationId xmlns:a16="http://schemas.microsoft.com/office/drawing/2014/main" id="{689EA4FB-A299-41F9-82D4-43C008D6FF84}"/>
               </a:ext>
             </a:extLst>
           </p:cNvPr>
@@ -12015,7 +12407,7 @@
           <p:cNvPr id="5" name="">
             <a:extLst xmlns:a="http://schemas.openxmlformats.org/drawingml/2006/main">
               <a:ext uri="{FF2B5EF4-FFF2-40B4-BE49-F238E27FC236}">
-                <a16:creationId xmlns:a16="http://schemas.microsoft.com/office/drawing/2014/main" id="{4F1BBB22-3336-43BE-955E-CBC25CF6F4BA}"/>
+                <a16:creationId xmlns:a16="http://schemas.microsoft.com/office/drawing/2014/main" id="{D46DB2AC-2399-4880-BB02-E1990F9CF6E9}"/>
               </a:ext>
             </a:extLst>
           </p:cNvPr>
@@ -12072,7 +12464,7 @@
           <p:cNvPr id="6" name="">
             <a:extLst xmlns:a="http://schemas.openxmlformats.org/drawingml/2006/main">
               <a:ext uri="{FF2B5EF4-FFF2-40B4-BE49-F238E27FC236}">
-                <a16:creationId xmlns:a16="http://schemas.microsoft.com/office/drawing/2014/main" id="{535AF14A-9B74-474C-91BA-721813A0F30F}"/>
+                <a16:creationId xmlns:a16="http://schemas.microsoft.com/office/drawing/2014/main" id="{0551238A-35AF-473E-BA80-3E76D6357C14}"/>
               </a:ext>
             </a:extLst>
           </p:cNvPr>
@@ -12129,7 +12521,7 @@
           <p:cNvPr id="7" name="">
             <a:extLst xmlns:a="http://schemas.openxmlformats.org/drawingml/2006/main">
               <a:ext uri="{FF2B5EF4-FFF2-40B4-BE49-F238E27FC236}">
-                <a16:creationId xmlns:a16="http://schemas.microsoft.com/office/drawing/2014/main" id="{0D469123-1FB8-4FC8-BB23-FC961B084597}"/>
+                <a16:creationId xmlns:a16="http://schemas.microsoft.com/office/drawing/2014/main" id="{DE2920FB-7485-4730-BFB8-D97213284A53}"/>
               </a:ext>
             </a:extLst>
           </p:cNvPr>
@@ -12161,7 +12553,7 @@
           <p:cNvPr id="8" name="">
             <a:extLst xmlns:a="http://schemas.openxmlformats.org/drawingml/2006/main">
               <a:ext uri="{FF2B5EF4-FFF2-40B4-BE49-F238E27FC236}">
-                <a16:creationId xmlns:a16="http://schemas.microsoft.com/office/drawing/2014/main" id="{090DEB5C-EB4E-4B07-ADBF-E915434C8AAB}"/>
+                <a16:creationId xmlns:a16="http://schemas.microsoft.com/office/drawing/2014/main" id="{54252E75-AD49-4D44-9CE5-9FA3406B2153}"/>
               </a:ext>
             </a:extLst>
           </p:cNvPr>
@@ -12218,7 +12610,7 @@
           <p:cNvPr id="9" name="">
             <a:extLst xmlns:a="http://schemas.openxmlformats.org/drawingml/2006/main">
               <a:ext uri="{FF2B5EF4-FFF2-40B4-BE49-F238E27FC236}">
-                <a16:creationId xmlns:a16="http://schemas.microsoft.com/office/drawing/2014/main" id="{DEAA5C65-0707-4C1C-910C-1EC0BC15B857}"/>
+                <a16:creationId xmlns:a16="http://schemas.microsoft.com/office/drawing/2014/main" id="{9258F464-335C-4168-A459-1A8E47AFCE33}"/>
               </a:ext>
             </a:extLst>
           </p:cNvPr>
@@ -12275,7 +12667,7 @@
           <p:cNvPr id="10" name="">
             <a:extLst xmlns:a="http://schemas.openxmlformats.org/drawingml/2006/main">
               <a:ext uri="{FF2B5EF4-FFF2-40B4-BE49-F238E27FC236}">
-                <a16:creationId xmlns:a16="http://schemas.microsoft.com/office/drawing/2014/main" id="{AC82880C-88C8-4448-96EF-142691439234}"/>
+                <a16:creationId xmlns:a16="http://schemas.microsoft.com/office/drawing/2014/main" id="{120053B2-CB83-4842-9615-309BC8BD2620}"/>
               </a:ext>
             </a:extLst>
           </p:cNvPr>
@@ -12309,7 +12701,7 @@
           <p:cNvPr id="11" name="">
             <a:extLst xmlns:a="http://schemas.openxmlformats.org/drawingml/2006/main">
               <a:ext uri="{FF2B5EF4-FFF2-40B4-BE49-F238E27FC236}">
-                <a16:creationId xmlns:a16="http://schemas.microsoft.com/office/drawing/2014/main" id="{E2FF3D80-5FC8-42A3-B917-2D973A24C108}"/>
+                <a16:creationId xmlns:a16="http://schemas.microsoft.com/office/drawing/2014/main" id="{A8C3FCC6-E03A-4AD9-A95B-F59A00B2036C}"/>
               </a:ext>
             </a:extLst>
           </p:cNvPr>
@@ -12341,7 +12733,7 @@
           <p:cNvPr id="12" name="">
             <a:extLst xmlns:a="http://schemas.openxmlformats.org/drawingml/2006/main">
               <a:ext uri="{FF2B5EF4-FFF2-40B4-BE49-F238E27FC236}">
-                <a16:creationId xmlns:a16="http://schemas.microsoft.com/office/drawing/2014/main" id="{6CC111EF-EB16-449C-A366-BE9F0DE21A6C}"/>
+                <a16:creationId xmlns:a16="http://schemas.microsoft.com/office/drawing/2014/main" id="{794B55A1-6274-4BF1-A875-29A1F9511293}"/>
               </a:ext>
             </a:extLst>
           </p:cNvPr>
@@ -12398,7 +12790,7 @@
           <p:cNvPr id="13" name="">
             <a:extLst xmlns:a="http://schemas.openxmlformats.org/drawingml/2006/main">
               <a:ext uri="{FF2B5EF4-FFF2-40B4-BE49-F238E27FC236}">
-                <a16:creationId xmlns:a16="http://schemas.microsoft.com/office/drawing/2014/main" id="{468280AA-9131-47CE-B6F9-A087594E3298}"/>
+                <a16:creationId xmlns:a16="http://schemas.microsoft.com/office/drawing/2014/main" id="{141B5007-0F04-4A5B-ADC4-3964DAEEDB8A}"/>
               </a:ext>
             </a:extLst>
           </p:cNvPr>
@@ -12455,7 +12847,7 @@
           <p:cNvPr id="14" name="">
             <a:extLst xmlns:a="http://schemas.openxmlformats.org/drawingml/2006/main">
               <a:ext uri="{FF2B5EF4-FFF2-40B4-BE49-F238E27FC236}">
-                <a16:creationId xmlns:a16="http://schemas.microsoft.com/office/drawing/2014/main" id="{8E6BF761-1287-48F3-A559-1648276C339D}"/>
+                <a16:creationId xmlns:a16="http://schemas.microsoft.com/office/drawing/2014/main" id="{7FEEE8FA-F669-4204-BF7E-3AE19D24EA3C}"/>
               </a:ext>
             </a:extLst>
           </p:cNvPr>
@@ -12489,7 +12881,7 @@
           <p:cNvPr id="15" name="">
             <a:extLst xmlns:a="http://schemas.openxmlformats.org/drawingml/2006/main">
               <a:ext uri="{FF2B5EF4-FFF2-40B4-BE49-F238E27FC236}">
-                <a16:creationId xmlns:a16="http://schemas.microsoft.com/office/drawing/2014/main" id="{C7F1A050-C417-4103-9A70-52DA95D79241}"/>
+                <a16:creationId xmlns:a16="http://schemas.microsoft.com/office/drawing/2014/main" id="{05443E87-6B40-4E16-888E-EE06D1E5EAA3}"/>
               </a:ext>
             </a:extLst>
           </p:cNvPr>
@@ -12521,7 +12913,7 @@
           <p:cNvPr id="16" name="">
             <a:extLst xmlns:a="http://schemas.openxmlformats.org/drawingml/2006/main">
               <a:ext uri="{FF2B5EF4-FFF2-40B4-BE49-F238E27FC236}">
-                <a16:creationId xmlns:a16="http://schemas.microsoft.com/office/drawing/2014/main" id="{B6E098D7-4807-4FAE-A5A7-6E35B3FE8980}"/>
+                <a16:creationId xmlns:a16="http://schemas.microsoft.com/office/drawing/2014/main" id="{BC4119B9-1933-469C-8154-C73F5047F762}"/>
               </a:ext>
             </a:extLst>
           </p:cNvPr>
@@ -12578,7 +12970,7 @@
           <p:cNvPr id="17" name="">
             <a:extLst xmlns:a="http://schemas.openxmlformats.org/drawingml/2006/main">
               <a:ext uri="{FF2B5EF4-FFF2-40B4-BE49-F238E27FC236}">
-                <a16:creationId xmlns:a16="http://schemas.microsoft.com/office/drawing/2014/main" id="{0047BA33-667F-4394-A036-D31AE3E97BF7}"/>
+                <a16:creationId xmlns:a16="http://schemas.microsoft.com/office/drawing/2014/main" id="{90BD31B5-A9EE-433D-94FA-D1A277978B86}"/>
               </a:ext>
             </a:extLst>
           </p:cNvPr>
@@ -12635,7 +13027,7 @@
           <p:cNvPr id="18" name="">
             <a:extLst xmlns:a="http://schemas.openxmlformats.org/drawingml/2006/main">
               <a:ext uri="{FF2B5EF4-FFF2-40B4-BE49-F238E27FC236}">
-                <a16:creationId xmlns:a16="http://schemas.microsoft.com/office/drawing/2014/main" id="{D5BB53CE-182B-4725-BFAF-0D6F2361165F}"/>
+                <a16:creationId xmlns:a16="http://schemas.microsoft.com/office/drawing/2014/main" id="{CBFFFE74-5EA7-459A-8227-253C0001B43F}"/>
               </a:ext>
             </a:extLst>
           </p:cNvPr>
@@ -12669,7 +13061,7 @@
           <p:cNvPr id="19" name="">
             <a:extLst xmlns:a="http://schemas.openxmlformats.org/drawingml/2006/main">
               <a:ext uri="{FF2B5EF4-FFF2-40B4-BE49-F238E27FC236}">
-                <a16:creationId xmlns:a16="http://schemas.microsoft.com/office/drawing/2014/main" id="{F3642D33-815E-4D2B-A6BD-F5E818598EB4}"/>
+                <a16:creationId xmlns:a16="http://schemas.microsoft.com/office/drawing/2014/main" id="{FE05E56A-2F8F-4FF0-813B-C54C627BB9C6}"/>
               </a:ext>
             </a:extLst>
           </p:cNvPr>
@@ -12701,7 +13093,7 @@
           <p:cNvPr id="20" name="">
             <a:extLst xmlns:a="http://schemas.openxmlformats.org/drawingml/2006/main">
               <a:ext uri="{FF2B5EF4-FFF2-40B4-BE49-F238E27FC236}">
-                <a16:creationId xmlns:a16="http://schemas.microsoft.com/office/drawing/2014/main" id="{FCEFFDAF-C119-4352-8B50-05DD1C995E96}"/>
+                <a16:creationId xmlns:a16="http://schemas.microsoft.com/office/drawing/2014/main" id="{640C33D4-3FDA-492C-9340-EFFADCE9EE8A}"/>
               </a:ext>
             </a:extLst>
           </p:cNvPr>
@@ -12758,7 +13150,7 @@
           <p:cNvPr id="21" name="">
             <a:extLst xmlns:a="http://schemas.openxmlformats.org/drawingml/2006/main">
               <a:ext uri="{FF2B5EF4-FFF2-40B4-BE49-F238E27FC236}">
-                <a16:creationId xmlns:a16="http://schemas.microsoft.com/office/drawing/2014/main" id="{428D2F8C-1519-45EB-9075-2E623CFA53CD}"/>
+                <a16:creationId xmlns:a16="http://schemas.microsoft.com/office/drawing/2014/main" id="{AD06FB38-C2E2-47CD-87F8-272ADC588A8A}"/>
               </a:ext>
             </a:extLst>
           </p:cNvPr>
@@ -12815,7 +13207,7 @@
           <p:cNvPr id="22" name="">
             <a:extLst xmlns:a="http://schemas.openxmlformats.org/drawingml/2006/main">
               <a:ext uri="{FF2B5EF4-FFF2-40B4-BE49-F238E27FC236}">
-                <a16:creationId xmlns:a16="http://schemas.microsoft.com/office/drawing/2014/main" id="{98A406A9-46BF-4472-9061-31DD7EFA490F}"/>
+                <a16:creationId xmlns:a16="http://schemas.microsoft.com/office/drawing/2014/main" id="{E12A0EA8-3173-435E-99EC-572D984A2CD1}"/>
               </a:ext>
             </a:extLst>
           </p:cNvPr>
@@ -12870,7 +13262,7 @@
     </p:spTree>
     <p:extLst>
       <p:ext uri="{BB962C8B-B14F-4D97-AF65-F5344CB8AC3E}">
-        <p14:creationId xmlns:p14="http://schemas.microsoft.com/office/powerpoint/2010/main" val="1214050631"/>
+        <p14:creationId xmlns:p14="http://schemas.microsoft.com/office/powerpoint/2010/main" val="69853251"/>
       </p:ext>
     </p:extLst>
   </p:cSld>
@@ -13071,7 +13463,7 @@
           <p:cNvPr id="22" name="">
             <a:extLst xmlns:a="http://schemas.openxmlformats.org/drawingml/2006/main">
               <a:ext uri="{FF2B5EF4-FFF2-40B4-BE49-F238E27FC236}">
-                <a16:creationId xmlns:a16="http://schemas.microsoft.com/office/drawing/2014/main" id="{41A00F46-B88A-4CF2-8525-302D52FEC6AE}"/>
+                <a16:creationId xmlns:a16="http://schemas.microsoft.com/office/drawing/2014/main" id="{D7AEA3C7-3EF6-4135-961F-83EF2AF6B357}"/>
               </a:ext>
             </a:extLst>
           </p:cNvPr>
@@ -13103,7 +13495,7 @@
           <p:cNvPr id="2" name="">
             <a:extLst xmlns:a="http://schemas.openxmlformats.org/drawingml/2006/main">
               <a:ext uri="{FF2B5EF4-FFF2-40B4-BE49-F238E27FC236}">
-                <a16:creationId xmlns:a16="http://schemas.microsoft.com/office/drawing/2014/main" id="{F1782B9E-A179-45A2-BA8E-0B11A52A332E}"/>
+                <a16:creationId xmlns:a16="http://schemas.microsoft.com/office/drawing/2014/main" id="{D1B831EC-F416-43EF-9E43-702F4CBF7E89}"/>
               </a:ext>
             </a:extLst>
           </p:cNvPr>
@@ -13160,7 +13552,7 @@
           <p:cNvPr id="3" name="">
             <a:extLst xmlns:a="http://schemas.openxmlformats.org/drawingml/2006/main">
               <a:ext uri="{FF2B5EF4-FFF2-40B4-BE49-F238E27FC236}">
-                <a16:creationId xmlns:a16="http://schemas.microsoft.com/office/drawing/2014/main" id="{D31AE2C4-27CB-4E66-9398-5D255A794C53}"/>
+                <a16:creationId xmlns:a16="http://schemas.microsoft.com/office/drawing/2014/main" id="{D69B5A8A-E95A-4180-867D-DEFEAFC00174}"/>
               </a:ext>
             </a:extLst>
           </p:cNvPr>
@@ -13192,7 +13584,7 @@
           <p:cNvPr id="4" name="">
             <a:extLst xmlns:a="http://schemas.openxmlformats.org/drawingml/2006/main">
               <a:ext uri="{FF2B5EF4-FFF2-40B4-BE49-F238E27FC236}">
-                <a16:creationId xmlns:a16="http://schemas.microsoft.com/office/drawing/2014/main" id="{DE846E66-4B0E-49A7-ADE1-50196E655F31}"/>
+                <a16:creationId xmlns:a16="http://schemas.microsoft.com/office/drawing/2014/main" id="{39796A5E-911A-4E85-B715-D5600186D9C9}"/>
               </a:ext>
             </a:extLst>
           </p:cNvPr>
@@ -13249,7 +13641,7 @@
           <p:cNvPr id="5" name="">
             <a:extLst xmlns:a="http://schemas.openxmlformats.org/drawingml/2006/main">
               <a:ext uri="{FF2B5EF4-FFF2-40B4-BE49-F238E27FC236}">
-                <a16:creationId xmlns:a16="http://schemas.microsoft.com/office/drawing/2014/main" id="{46BC0C0A-40A7-4196-8117-3CB858DFC047}"/>
+                <a16:creationId xmlns:a16="http://schemas.microsoft.com/office/drawing/2014/main" id="{1DCC40A8-53BD-48C0-8DBB-509876BAD747}"/>
               </a:ext>
             </a:extLst>
           </p:cNvPr>
@@ -13306,7 +13698,7 @@
           <p:cNvPr id="6" name="">
             <a:extLst xmlns:a="http://schemas.openxmlformats.org/drawingml/2006/main">
               <a:ext uri="{FF2B5EF4-FFF2-40B4-BE49-F238E27FC236}">
-                <a16:creationId xmlns:a16="http://schemas.microsoft.com/office/drawing/2014/main" id="{0F95B29A-1249-413F-B611-B02D72A0CB02}"/>
+                <a16:creationId xmlns:a16="http://schemas.microsoft.com/office/drawing/2014/main" id="{7B236429-768A-475C-BBDA-1E8E58593B83}"/>
               </a:ext>
             </a:extLst>
           </p:cNvPr>
@@ -13363,7 +13755,7 @@
           <p:cNvPr id="7" name="">
             <a:extLst xmlns:a="http://schemas.openxmlformats.org/drawingml/2006/main">
               <a:ext uri="{FF2B5EF4-FFF2-40B4-BE49-F238E27FC236}">
-                <a16:creationId xmlns:a16="http://schemas.microsoft.com/office/drawing/2014/main" id="{7DC6A97B-B446-4EE6-8AE9-347CBACF0E37}"/>
+                <a16:creationId xmlns:a16="http://schemas.microsoft.com/office/drawing/2014/main" id="{8F4108A7-6960-4E19-86A2-80E36586E206}"/>
               </a:ext>
             </a:extLst>
           </p:cNvPr>
@@ -13395,7 +13787,7 @@
           <p:cNvPr id="8" name="">
             <a:extLst xmlns:a="http://schemas.openxmlformats.org/drawingml/2006/main">
               <a:ext uri="{FF2B5EF4-FFF2-40B4-BE49-F238E27FC236}">
-                <a16:creationId xmlns:a16="http://schemas.microsoft.com/office/drawing/2014/main" id="{5ADF8A98-FC0C-4B08-A650-DD67455135C7}"/>
+                <a16:creationId xmlns:a16="http://schemas.microsoft.com/office/drawing/2014/main" id="{BFBD42B0-97F4-43FD-842F-AE75549F2263}"/>
               </a:ext>
             </a:extLst>
           </p:cNvPr>
@@ -13452,7 +13844,7 @@
           <p:cNvPr id="9" name="">
             <a:extLst xmlns:a="http://schemas.openxmlformats.org/drawingml/2006/main">
               <a:ext uri="{FF2B5EF4-FFF2-40B4-BE49-F238E27FC236}">
-                <a16:creationId xmlns:a16="http://schemas.microsoft.com/office/drawing/2014/main" id="{EA627B4E-23D7-453F-B99C-46DCE61D1C78}"/>
+                <a16:creationId xmlns:a16="http://schemas.microsoft.com/office/drawing/2014/main" id="{64668ACD-2843-441D-8E03-A2DDE49CFBF2}"/>
               </a:ext>
             </a:extLst>
           </p:cNvPr>
@@ -13509,7 +13901,7 @@
           <p:cNvPr id="10" name="">
             <a:extLst xmlns:a="http://schemas.openxmlformats.org/drawingml/2006/main">
               <a:ext uri="{FF2B5EF4-FFF2-40B4-BE49-F238E27FC236}">
-                <a16:creationId xmlns:a16="http://schemas.microsoft.com/office/drawing/2014/main" id="{B4A42555-B636-44AB-92B9-D7C11C691F08}"/>
+                <a16:creationId xmlns:a16="http://schemas.microsoft.com/office/drawing/2014/main" id="{C6F8D83A-DE7B-4AB1-BB80-948C8ABCE2C9}"/>
               </a:ext>
             </a:extLst>
           </p:cNvPr>
@@ -13543,7 +13935,7 @@
           <p:cNvPr id="11" name="">
             <a:extLst xmlns:a="http://schemas.openxmlformats.org/drawingml/2006/main">
               <a:ext uri="{FF2B5EF4-FFF2-40B4-BE49-F238E27FC236}">
-                <a16:creationId xmlns:a16="http://schemas.microsoft.com/office/drawing/2014/main" id="{E0F3923F-2880-44D2-BA8A-5FE2BDFE7066}"/>
+                <a16:creationId xmlns:a16="http://schemas.microsoft.com/office/drawing/2014/main" id="{07313191-DA66-4D47-9BCF-269DF4CE3B49}"/>
               </a:ext>
             </a:extLst>
           </p:cNvPr>
@@ -13575,7 +13967,7 @@
           <p:cNvPr id="12" name="">
             <a:extLst xmlns:a="http://schemas.openxmlformats.org/drawingml/2006/main">
               <a:ext uri="{FF2B5EF4-FFF2-40B4-BE49-F238E27FC236}">
-                <a16:creationId xmlns:a16="http://schemas.microsoft.com/office/drawing/2014/main" id="{C7A85190-917A-49C4-AE2F-76C51D04FF79}"/>
+                <a16:creationId xmlns:a16="http://schemas.microsoft.com/office/drawing/2014/main" id="{2F8525F8-A72F-406A-A7EB-788DF256C727}"/>
               </a:ext>
             </a:extLst>
           </p:cNvPr>
@@ -13632,7 +14024,7 @@
           <p:cNvPr id="13" name="">
             <a:extLst xmlns:a="http://schemas.openxmlformats.org/drawingml/2006/main">
               <a:ext uri="{FF2B5EF4-FFF2-40B4-BE49-F238E27FC236}">
-                <a16:creationId xmlns:a16="http://schemas.microsoft.com/office/drawing/2014/main" id="{B098BD6F-A865-4A15-BB1A-4C0D49F01FBF}"/>
+                <a16:creationId xmlns:a16="http://schemas.microsoft.com/office/drawing/2014/main" id="{AD93D6F2-7E6A-4FF4-A202-29B1D9ED680D}"/>
               </a:ext>
             </a:extLst>
           </p:cNvPr>
@@ -13689,7 +14081,7 @@
           <p:cNvPr id="14" name="">
             <a:extLst xmlns:a="http://schemas.openxmlformats.org/drawingml/2006/main">
               <a:ext uri="{FF2B5EF4-FFF2-40B4-BE49-F238E27FC236}">
-                <a16:creationId xmlns:a16="http://schemas.microsoft.com/office/drawing/2014/main" id="{10747741-1AB5-4091-80C8-70452664B022}"/>
+                <a16:creationId xmlns:a16="http://schemas.microsoft.com/office/drawing/2014/main" id="{143E25F5-9955-47D0-BCC3-D9F70111A9F4}"/>
               </a:ext>
             </a:extLst>
           </p:cNvPr>
@@ -13723,7 +14115,7 @@
           <p:cNvPr id="15" name="">
             <a:extLst xmlns:a="http://schemas.openxmlformats.org/drawingml/2006/main">
               <a:ext uri="{FF2B5EF4-FFF2-40B4-BE49-F238E27FC236}">
-                <a16:creationId xmlns:a16="http://schemas.microsoft.com/office/drawing/2014/main" id="{0304ADA8-38BB-400E-ADA8-803D3DF9FB02}"/>
+                <a16:creationId xmlns:a16="http://schemas.microsoft.com/office/drawing/2014/main" id="{ED7B1554-86B6-4DE8-9E78-86EB2C0506E5}"/>
               </a:ext>
             </a:extLst>
           </p:cNvPr>
@@ -13755,7 +14147,7 @@
           <p:cNvPr id="16" name="">
             <a:extLst xmlns:a="http://schemas.openxmlformats.org/drawingml/2006/main">
               <a:ext uri="{FF2B5EF4-FFF2-40B4-BE49-F238E27FC236}">
-                <a16:creationId xmlns:a16="http://schemas.microsoft.com/office/drawing/2014/main" id="{0AF57C65-4FFC-4EB4-B237-411A24537F86}"/>
+                <a16:creationId xmlns:a16="http://schemas.microsoft.com/office/drawing/2014/main" id="{E2B54CF9-B390-41CE-9912-D9E2009A1737}"/>
               </a:ext>
             </a:extLst>
           </p:cNvPr>
@@ -13812,7 +14204,7 @@
           <p:cNvPr id="17" name="">
             <a:extLst xmlns:a="http://schemas.openxmlformats.org/drawingml/2006/main">
               <a:ext uri="{FF2B5EF4-FFF2-40B4-BE49-F238E27FC236}">
-                <a16:creationId xmlns:a16="http://schemas.microsoft.com/office/drawing/2014/main" id="{385818DE-2D47-4745-A510-429DE4FB372E}"/>
+                <a16:creationId xmlns:a16="http://schemas.microsoft.com/office/drawing/2014/main" id="{B36CBAD5-3D99-4E08-B58C-AC952BB60F64}"/>
               </a:ext>
             </a:extLst>
           </p:cNvPr>
@@ -13869,7 +14261,7 @@
           <p:cNvPr id="18" name="">
             <a:extLst xmlns:a="http://schemas.openxmlformats.org/drawingml/2006/main">
               <a:ext uri="{FF2B5EF4-FFF2-40B4-BE49-F238E27FC236}">
-                <a16:creationId xmlns:a16="http://schemas.microsoft.com/office/drawing/2014/main" id="{7E78F84A-DB03-4125-889A-E3715444372E}"/>
+                <a16:creationId xmlns:a16="http://schemas.microsoft.com/office/drawing/2014/main" id="{C675B167-E5DC-48E0-8AE7-5D9E002BFEC2}"/>
               </a:ext>
             </a:extLst>
           </p:cNvPr>
@@ -13903,7 +14295,7 @@
           <p:cNvPr id="19" name="">
             <a:extLst xmlns:a="http://schemas.openxmlformats.org/drawingml/2006/main">
               <a:ext uri="{FF2B5EF4-FFF2-40B4-BE49-F238E27FC236}">
-                <a16:creationId xmlns:a16="http://schemas.microsoft.com/office/drawing/2014/main" id="{3EEBDD3C-D2CD-430F-9A79-EB98FE3F142B}"/>
+                <a16:creationId xmlns:a16="http://schemas.microsoft.com/office/drawing/2014/main" id="{90CB914A-43EE-4FD7-90E9-93B89FFD8316}"/>
               </a:ext>
             </a:extLst>
           </p:cNvPr>
@@ -13935,7 +14327,7 @@
           <p:cNvPr id="20" name="">
             <a:extLst xmlns:a="http://schemas.openxmlformats.org/drawingml/2006/main">
               <a:ext uri="{FF2B5EF4-FFF2-40B4-BE49-F238E27FC236}">
-                <a16:creationId xmlns:a16="http://schemas.microsoft.com/office/drawing/2014/main" id="{A48B1A39-F569-4864-9C01-928FE3227F15}"/>
+                <a16:creationId xmlns:a16="http://schemas.microsoft.com/office/drawing/2014/main" id="{68B8445F-6E90-409F-99D2-854CFD0DA53E}"/>
               </a:ext>
             </a:extLst>
           </p:cNvPr>
@@ -13992,7 +14384,7 @@
           <p:cNvPr id="21" name="">
             <a:extLst xmlns:a="http://schemas.openxmlformats.org/drawingml/2006/main">
               <a:ext uri="{FF2B5EF4-FFF2-40B4-BE49-F238E27FC236}">
-                <a16:creationId xmlns:a16="http://schemas.microsoft.com/office/drawing/2014/main" id="{F1554EF2-5743-4443-A132-E6F62ECF0B70}"/>
+                <a16:creationId xmlns:a16="http://schemas.microsoft.com/office/drawing/2014/main" id="{1B336C9A-828A-4D66-82F6-984B67C29A1C}"/>
               </a:ext>
             </a:extLst>
           </p:cNvPr>
@@ -14047,7 +14439,7 @@
     </p:spTree>
     <p:extLst>
       <p:ext uri="{BB962C8B-B14F-4D97-AF65-F5344CB8AC3E}">
-        <p14:creationId xmlns:p14="http://schemas.microsoft.com/office/powerpoint/2010/main" val="259475502"/>
+        <p14:creationId xmlns:p14="http://schemas.microsoft.com/office/powerpoint/2010/main" val="647135152"/>
       </p:ext>
     </p:extLst>
   </p:cSld>
